--- a/2024-latex/defense_presentation.pptx
+++ b/2024-latex/defense_presentation.pptx
@@ -5,28 +5,28 @@
     <p:sldMasterId id="2147483648" r:id="rId1"/>
   </p:sldMasterIdLst>
   <p:sldIdLst>
-    <p:sldId id="256" r:id="rId7"/>
-    <p:sldId id="257" r:id="rId8"/>
-    <p:sldId id="258" r:id="rId9"/>
-    <p:sldId id="259" r:id="rId10"/>
-    <p:sldId id="260" r:id="rId11"/>
-    <p:sldId id="261" r:id="rId12"/>
-    <p:sldId id="262" r:id="rId13"/>
-    <p:sldId id="263" r:id="rId14"/>
-    <p:sldId id="264" r:id="rId15"/>
-    <p:sldId id="265" r:id="rId16"/>
-    <p:sldId id="266" r:id="rId17"/>
-    <p:sldId id="267" r:id="rId18"/>
-    <p:sldId id="268" r:id="rId19"/>
-    <p:sldId id="269" r:id="rId20"/>
-    <p:sldId id="270" r:id="rId21"/>
-    <p:sldId id="271" r:id="rId22"/>
-    <p:sldId id="272" r:id="rId23"/>
-    <p:sldId id="273" r:id="rId24"/>
-    <p:sldId id="274" r:id="rId25"/>
-    <p:sldId id="275" r:id="rId26"/>
+    <p:sldId id="256" r:id="rId2"/>
+    <p:sldId id="257" r:id="rId3"/>
+    <p:sldId id="258" r:id="rId4"/>
+    <p:sldId id="259" r:id="rId5"/>
+    <p:sldId id="260" r:id="rId6"/>
+    <p:sldId id="261" r:id="rId7"/>
+    <p:sldId id="262" r:id="rId8"/>
+    <p:sldId id="263" r:id="rId9"/>
+    <p:sldId id="264" r:id="rId10"/>
+    <p:sldId id="265" r:id="rId11"/>
+    <p:sldId id="266" r:id="rId12"/>
+    <p:sldId id="267" r:id="rId13"/>
+    <p:sldId id="268" r:id="rId14"/>
+    <p:sldId id="269" r:id="rId15"/>
+    <p:sldId id="270" r:id="rId16"/>
+    <p:sldId id="271" r:id="rId17"/>
+    <p:sldId id="272" r:id="rId18"/>
+    <p:sldId id="273" r:id="rId19"/>
+    <p:sldId id="274" r:id="rId20"/>
+    <p:sldId id="275" r:id="rId21"/>
   </p:sldIdLst>
-  <p:sldSz cx="12191695" cy="6858000" type="screen4x3"/>
+  <p:sldSz cx="12192000" cy="6858000"/>
   <p:notesSz cx="6858000" cy="9144000"/>
   <p:defaultTextStyle>
     <a:defPPr>
@@ -123,6 +123,22 @@
       </a:defRPr>
     </a:lvl9pPr>
   </p:defaultTextStyle>
+  <p:extLst>
+    <p:ext uri="{EFAFB233-063F-42B5-8137-9DF3F51BA10A}">
+      <p15:sldGuideLst xmlns:p15="http://schemas.microsoft.com/office/powerpoint/2012/main">
+        <p15:guide id="1" orient="horz" pos="2160">
+          <p15:clr>
+            <a:srgbClr val="A4A3A4"/>
+          </p15:clr>
+        </p15:guide>
+        <p15:guide id="2" pos="2880">
+          <p15:clr>
+            <a:srgbClr val="A4A3A4"/>
+          </p15:clr>
+        </p15:guide>
+      </p15:sldGuideLst>
+    </p:ext>
+  </p:extLst>
 </p:presentation>
 </file>
 
@@ -164,10 +180,9 @@
           <a:lstStyle/>
           <a:p>
             <a:r>
-              <a:rPr lang="en-US" smtClean="0"/>
+              <a:rPr lang="en-US"/>
               <a:t>Click to edit Master title style</a:t>
             </a:r>
-            <a:endParaRPr lang="en-US"/>
           </a:p>
         </p:txBody>
       </p:sp>
@@ -283,10 +298,9 @@
           </a:lstStyle>
           <a:p>
             <a:r>
-              <a:rPr lang="en-US" smtClean="0"/>
+              <a:rPr lang="en-US"/>
               <a:t>Click to edit Master subtitle style</a:t>
             </a:r>
-            <a:endParaRPr lang="en-US"/>
           </a:p>
         </p:txBody>
       </p:sp>
@@ -307,7 +321,7 @@
           <a:p>
             <a:fld id="{5BCAD085-E8A6-8845-BD4E-CB4CCA059FC4}" type="datetimeFigureOut">
               <a:rPr lang="en-US" smtClean="0"/>
-              <a:t>1/27/13</a:t>
+              <a:t>5/28/26</a:t>
             </a:fld>
             <a:endParaRPr lang="en-US"/>
           </a:p>
@@ -401,10 +415,9 @@
           <a:lstStyle/>
           <a:p>
             <a:r>
-              <a:rPr lang="en-US" smtClean="0"/>
+              <a:rPr lang="en-US"/>
               <a:t>Click to edit Master title style</a:t>
             </a:r>
-            <a:endParaRPr lang="en-US"/>
           </a:p>
         </p:txBody>
       </p:sp>
@@ -425,38 +438,37 @@
           <a:p>
             <a:pPr lvl="0"/>
             <a:r>
-              <a:rPr lang="en-US" smtClean="0"/>
+              <a:rPr lang="en-US"/>
               <a:t>Click to edit Master text styles</a:t>
             </a:r>
           </a:p>
           <a:p>
             <a:pPr lvl="1"/>
             <a:r>
-              <a:rPr lang="en-US" smtClean="0"/>
+              <a:rPr lang="en-US"/>
               <a:t>Second level</a:t>
             </a:r>
           </a:p>
           <a:p>
             <a:pPr lvl="2"/>
             <a:r>
-              <a:rPr lang="en-US" smtClean="0"/>
+              <a:rPr lang="en-US"/>
               <a:t>Third level</a:t>
             </a:r>
           </a:p>
           <a:p>
             <a:pPr lvl="3"/>
             <a:r>
-              <a:rPr lang="en-US" smtClean="0"/>
+              <a:rPr lang="en-US"/>
               <a:t>Fourth level</a:t>
             </a:r>
           </a:p>
           <a:p>
             <a:pPr lvl="4"/>
             <a:r>
-              <a:rPr lang="en-US" smtClean="0"/>
+              <a:rPr lang="en-US"/>
               <a:t>Fifth level</a:t>
             </a:r>
-            <a:endParaRPr lang="en-US"/>
           </a:p>
         </p:txBody>
       </p:sp>
@@ -477,7 +489,7 @@
           <a:p>
             <a:fld id="{5BCAD085-E8A6-8845-BD4E-CB4CCA059FC4}" type="datetimeFigureOut">
               <a:rPr lang="en-US" smtClean="0"/>
-              <a:t>1/27/13</a:t>
+              <a:t>5/28/26</a:t>
             </a:fld>
             <a:endParaRPr lang="en-US"/>
           </a:p>
@@ -576,10 +588,9 @@
           <a:lstStyle/>
           <a:p>
             <a:r>
-              <a:rPr lang="en-US" smtClean="0"/>
+              <a:rPr lang="en-US"/>
               <a:t>Click to edit Master title style</a:t>
             </a:r>
-            <a:endParaRPr lang="en-US"/>
           </a:p>
         </p:txBody>
       </p:sp>
@@ -605,38 +616,37 @@
           <a:p>
             <a:pPr lvl="0"/>
             <a:r>
-              <a:rPr lang="en-US" smtClean="0"/>
+              <a:rPr lang="en-US"/>
               <a:t>Click to edit Master text styles</a:t>
             </a:r>
           </a:p>
           <a:p>
             <a:pPr lvl="1"/>
             <a:r>
-              <a:rPr lang="en-US" smtClean="0"/>
+              <a:rPr lang="en-US"/>
               <a:t>Second level</a:t>
             </a:r>
           </a:p>
           <a:p>
             <a:pPr lvl="2"/>
             <a:r>
-              <a:rPr lang="en-US" smtClean="0"/>
+              <a:rPr lang="en-US"/>
               <a:t>Third level</a:t>
             </a:r>
           </a:p>
           <a:p>
             <a:pPr lvl="3"/>
             <a:r>
-              <a:rPr lang="en-US" smtClean="0"/>
+              <a:rPr lang="en-US"/>
               <a:t>Fourth level</a:t>
             </a:r>
           </a:p>
           <a:p>
             <a:pPr lvl="4"/>
             <a:r>
-              <a:rPr lang="en-US" smtClean="0"/>
+              <a:rPr lang="en-US"/>
               <a:t>Fifth level</a:t>
             </a:r>
-            <a:endParaRPr lang="en-US"/>
           </a:p>
         </p:txBody>
       </p:sp>
@@ -657,7 +667,7 @@
           <a:p>
             <a:fld id="{5BCAD085-E8A6-8845-BD4E-CB4CCA059FC4}" type="datetimeFigureOut">
               <a:rPr lang="en-US" smtClean="0"/>
-              <a:t>1/27/13</a:t>
+              <a:t>5/28/26</a:t>
             </a:fld>
             <a:endParaRPr lang="en-US"/>
           </a:p>
@@ -751,10 +761,9 @@
           <a:lstStyle/>
           <a:p>
             <a:r>
-              <a:rPr lang="en-US" smtClean="0"/>
+              <a:rPr lang="en-US"/>
               <a:t>Click to edit Master title style</a:t>
             </a:r>
-            <a:endParaRPr lang="en-US"/>
           </a:p>
         </p:txBody>
       </p:sp>
@@ -775,38 +784,37 @@
           <a:p>
             <a:pPr lvl="0"/>
             <a:r>
-              <a:rPr lang="en-US" smtClean="0"/>
+              <a:rPr lang="en-US"/>
               <a:t>Click to edit Master text styles</a:t>
             </a:r>
           </a:p>
           <a:p>
             <a:pPr lvl="1"/>
             <a:r>
-              <a:rPr lang="en-US" smtClean="0"/>
+              <a:rPr lang="en-US"/>
               <a:t>Second level</a:t>
             </a:r>
           </a:p>
           <a:p>
             <a:pPr lvl="2"/>
             <a:r>
-              <a:rPr lang="en-US" smtClean="0"/>
+              <a:rPr lang="en-US"/>
               <a:t>Third level</a:t>
             </a:r>
           </a:p>
           <a:p>
             <a:pPr lvl="3"/>
             <a:r>
-              <a:rPr lang="en-US" smtClean="0"/>
+              <a:rPr lang="en-US"/>
               <a:t>Fourth level</a:t>
             </a:r>
           </a:p>
           <a:p>
             <a:pPr lvl="4"/>
             <a:r>
-              <a:rPr lang="en-US" smtClean="0"/>
+              <a:rPr lang="en-US"/>
               <a:t>Fifth level</a:t>
             </a:r>
-            <a:endParaRPr lang="en-US"/>
           </a:p>
         </p:txBody>
       </p:sp>
@@ -827,7 +835,7 @@
           <a:p>
             <a:fld id="{5BCAD085-E8A6-8845-BD4E-CB4CCA059FC4}" type="datetimeFigureOut">
               <a:rPr lang="en-US" smtClean="0"/>
-              <a:t>1/27/13</a:t>
+              <a:t>5/28/26</a:t>
             </a:fld>
             <a:endParaRPr lang="en-US"/>
           </a:p>
@@ -930,10 +938,9 @@
           </a:lstStyle>
           <a:p>
             <a:r>
-              <a:rPr lang="en-US" smtClean="0"/>
+              <a:rPr lang="en-US"/>
               <a:t>Click to edit Master title style</a:t>
             </a:r>
-            <a:endParaRPr lang="en-US"/>
           </a:p>
         </p:txBody>
       </p:sp>
@@ -1050,7 +1057,7 @@
           <a:p>
             <a:pPr lvl="0"/>
             <a:r>
-              <a:rPr lang="en-US" smtClean="0"/>
+              <a:rPr lang="en-US"/>
               <a:t>Click to edit Master text styles</a:t>
             </a:r>
           </a:p>
@@ -1073,7 +1080,7 @@
           <a:p>
             <a:fld id="{5BCAD085-E8A6-8845-BD4E-CB4CCA059FC4}" type="datetimeFigureOut">
               <a:rPr lang="en-US" smtClean="0"/>
-              <a:t>1/27/13</a:t>
+              <a:t>5/28/26</a:t>
             </a:fld>
             <a:endParaRPr lang="en-US"/>
           </a:p>
@@ -1167,10 +1174,9 @@
           <a:lstStyle/>
           <a:p>
             <a:r>
-              <a:rPr lang="en-US" smtClean="0"/>
+              <a:rPr lang="en-US"/>
               <a:t>Click to edit Master title style</a:t>
             </a:r>
-            <a:endParaRPr lang="en-US"/>
           </a:p>
         </p:txBody>
       </p:sp>
@@ -1224,38 +1230,37 @@
           <a:p>
             <a:pPr lvl="0"/>
             <a:r>
-              <a:rPr lang="en-US" smtClean="0"/>
+              <a:rPr lang="en-US"/>
               <a:t>Click to edit Master text styles</a:t>
             </a:r>
           </a:p>
           <a:p>
             <a:pPr lvl="1"/>
             <a:r>
-              <a:rPr lang="en-US" smtClean="0"/>
+              <a:rPr lang="en-US"/>
               <a:t>Second level</a:t>
             </a:r>
           </a:p>
           <a:p>
             <a:pPr lvl="2"/>
             <a:r>
-              <a:rPr lang="en-US" smtClean="0"/>
+              <a:rPr lang="en-US"/>
               <a:t>Third level</a:t>
             </a:r>
           </a:p>
           <a:p>
             <a:pPr lvl="3"/>
             <a:r>
-              <a:rPr lang="en-US" smtClean="0"/>
+              <a:rPr lang="en-US"/>
               <a:t>Fourth level</a:t>
             </a:r>
           </a:p>
           <a:p>
             <a:pPr lvl="4"/>
             <a:r>
-              <a:rPr lang="en-US" smtClean="0"/>
+              <a:rPr lang="en-US"/>
               <a:t>Fifth level</a:t>
             </a:r>
-            <a:endParaRPr lang="en-US"/>
           </a:p>
         </p:txBody>
       </p:sp>
@@ -1309,38 +1314,37 @@
           <a:p>
             <a:pPr lvl="0"/>
             <a:r>
-              <a:rPr lang="en-US" smtClean="0"/>
+              <a:rPr lang="en-US"/>
               <a:t>Click to edit Master text styles</a:t>
             </a:r>
           </a:p>
           <a:p>
             <a:pPr lvl="1"/>
             <a:r>
-              <a:rPr lang="en-US" smtClean="0"/>
+              <a:rPr lang="en-US"/>
               <a:t>Second level</a:t>
             </a:r>
           </a:p>
           <a:p>
             <a:pPr lvl="2"/>
             <a:r>
-              <a:rPr lang="en-US" smtClean="0"/>
+              <a:rPr lang="en-US"/>
               <a:t>Third level</a:t>
             </a:r>
           </a:p>
           <a:p>
             <a:pPr lvl="3"/>
             <a:r>
-              <a:rPr lang="en-US" smtClean="0"/>
+              <a:rPr lang="en-US"/>
               <a:t>Fourth level</a:t>
             </a:r>
           </a:p>
           <a:p>
             <a:pPr lvl="4"/>
             <a:r>
-              <a:rPr lang="en-US" smtClean="0"/>
+              <a:rPr lang="en-US"/>
               <a:t>Fifth level</a:t>
             </a:r>
-            <a:endParaRPr lang="en-US"/>
           </a:p>
         </p:txBody>
       </p:sp>
@@ -1361,7 +1365,7 @@
           <a:p>
             <a:fld id="{5BCAD085-E8A6-8845-BD4E-CB4CCA059FC4}" type="datetimeFigureOut">
               <a:rPr lang="en-US" smtClean="0"/>
-              <a:t>1/27/13</a:t>
+              <a:t>5/28/26</a:t>
             </a:fld>
             <a:endParaRPr lang="en-US"/>
           </a:p>
@@ -1459,10 +1463,9 @@
           </a:lstStyle>
           <a:p>
             <a:r>
-              <a:rPr lang="en-US" smtClean="0"/>
+              <a:rPr lang="en-US"/>
               <a:t>Click to edit Master title style</a:t>
             </a:r>
-            <a:endParaRPr lang="en-US"/>
           </a:p>
         </p:txBody>
       </p:sp>
@@ -1525,7 +1528,7 @@
           <a:p>
             <a:pPr lvl="0"/>
             <a:r>
-              <a:rPr lang="en-US" smtClean="0"/>
+              <a:rPr lang="en-US"/>
               <a:t>Click to edit Master text styles</a:t>
             </a:r>
           </a:p>
@@ -1581,38 +1584,37 @@
           <a:p>
             <a:pPr lvl="0"/>
             <a:r>
-              <a:rPr lang="en-US" smtClean="0"/>
+              <a:rPr lang="en-US"/>
               <a:t>Click to edit Master text styles</a:t>
             </a:r>
           </a:p>
           <a:p>
             <a:pPr lvl="1"/>
             <a:r>
-              <a:rPr lang="en-US" smtClean="0"/>
+              <a:rPr lang="en-US"/>
               <a:t>Second level</a:t>
             </a:r>
           </a:p>
           <a:p>
             <a:pPr lvl="2"/>
             <a:r>
-              <a:rPr lang="en-US" smtClean="0"/>
+              <a:rPr lang="en-US"/>
               <a:t>Third level</a:t>
             </a:r>
           </a:p>
           <a:p>
             <a:pPr lvl="3"/>
             <a:r>
-              <a:rPr lang="en-US" smtClean="0"/>
+              <a:rPr lang="en-US"/>
               <a:t>Fourth level</a:t>
             </a:r>
           </a:p>
           <a:p>
             <a:pPr lvl="4"/>
             <a:r>
-              <a:rPr lang="en-US" smtClean="0"/>
+              <a:rPr lang="en-US"/>
               <a:t>Fifth level</a:t>
             </a:r>
-            <a:endParaRPr lang="en-US"/>
           </a:p>
         </p:txBody>
       </p:sp>
@@ -1675,7 +1677,7 @@
           <a:p>
             <a:pPr lvl="0"/>
             <a:r>
-              <a:rPr lang="en-US" smtClean="0"/>
+              <a:rPr lang="en-US"/>
               <a:t>Click to edit Master text styles</a:t>
             </a:r>
           </a:p>
@@ -1731,38 +1733,37 @@
           <a:p>
             <a:pPr lvl="0"/>
             <a:r>
-              <a:rPr lang="en-US" smtClean="0"/>
+              <a:rPr lang="en-US"/>
               <a:t>Click to edit Master text styles</a:t>
             </a:r>
           </a:p>
           <a:p>
             <a:pPr lvl="1"/>
             <a:r>
-              <a:rPr lang="en-US" smtClean="0"/>
+              <a:rPr lang="en-US"/>
               <a:t>Second level</a:t>
             </a:r>
           </a:p>
           <a:p>
             <a:pPr lvl="2"/>
             <a:r>
-              <a:rPr lang="en-US" smtClean="0"/>
+              <a:rPr lang="en-US"/>
               <a:t>Third level</a:t>
             </a:r>
           </a:p>
           <a:p>
             <a:pPr lvl="3"/>
             <a:r>
-              <a:rPr lang="en-US" smtClean="0"/>
+              <a:rPr lang="en-US"/>
               <a:t>Fourth level</a:t>
             </a:r>
           </a:p>
           <a:p>
             <a:pPr lvl="4"/>
             <a:r>
-              <a:rPr lang="en-US" smtClean="0"/>
+              <a:rPr lang="en-US"/>
               <a:t>Fifth level</a:t>
             </a:r>
-            <a:endParaRPr lang="en-US"/>
           </a:p>
         </p:txBody>
       </p:sp>
@@ -1783,7 +1784,7 @@
           <a:p>
             <a:fld id="{5BCAD085-E8A6-8845-BD4E-CB4CCA059FC4}" type="datetimeFigureOut">
               <a:rPr lang="en-US" smtClean="0"/>
-              <a:t>1/27/13</a:t>
+              <a:t>5/28/26</a:t>
             </a:fld>
             <a:endParaRPr lang="en-US"/>
           </a:p>
@@ -1877,10 +1878,9 @@
           <a:lstStyle/>
           <a:p>
             <a:r>
-              <a:rPr lang="en-US" smtClean="0"/>
+              <a:rPr lang="en-US"/>
               <a:t>Click to edit Master title style</a:t>
             </a:r>
-            <a:endParaRPr lang="en-US"/>
           </a:p>
         </p:txBody>
       </p:sp>
@@ -1901,7 +1901,7 @@
           <a:p>
             <a:fld id="{5BCAD085-E8A6-8845-BD4E-CB4CCA059FC4}" type="datetimeFigureOut">
               <a:rPr lang="en-US" smtClean="0"/>
-              <a:t>1/27/13</a:t>
+              <a:t>5/28/26</a:t>
             </a:fld>
             <a:endParaRPr lang="en-US"/>
           </a:p>
@@ -1996,7 +1996,7 @@
           <a:p>
             <a:fld id="{5BCAD085-E8A6-8845-BD4E-CB4CCA059FC4}" type="datetimeFigureOut">
               <a:rPr lang="en-US" smtClean="0"/>
-              <a:t>1/27/13</a:t>
+              <a:t>5/28/26</a:t>
             </a:fld>
             <a:endParaRPr lang="en-US"/>
           </a:p>
@@ -2099,10 +2099,9 @@
           </a:lstStyle>
           <a:p>
             <a:r>
-              <a:rPr lang="en-US" smtClean="0"/>
+              <a:rPr lang="en-US"/>
               <a:t>Click to edit Master title style</a:t>
             </a:r>
-            <a:endParaRPr lang="en-US"/>
           </a:p>
         </p:txBody>
       </p:sp>
@@ -2156,38 +2155,37 @@
           <a:p>
             <a:pPr lvl="0"/>
             <a:r>
-              <a:rPr lang="en-US" smtClean="0"/>
+              <a:rPr lang="en-US"/>
               <a:t>Click to edit Master text styles</a:t>
             </a:r>
           </a:p>
           <a:p>
             <a:pPr lvl="1"/>
             <a:r>
-              <a:rPr lang="en-US" smtClean="0"/>
+              <a:rPr lang="en-US"/>
               <a:t>Second level</a:t>
             </a:r>
           </a:p>
           <a:p>
             <a:pPr lvl="2"/>
             <a:r>
-              <a:rPr lang="en-US" smtClean="0"/>
+              <a:rPr lang="en-US"/>
               <a:t>Third level</a:t>
             </a:r>
           </a:p>
           <a:p>
             <a:pPr lvl="3"/>
             <a:r>
-              <a:rPr lang="en-US" smtClean="0"/>
+              <a:rPr lang="en-US"/>
               <a:t>Fourth level</a:t>
             </a:r>
           </a:p>
           <a:p>
             <a:pPr lvl="4"/>
             <a:r>
-              <a:rPr lang="en-US" smtClean="0"/>
+              <a:rPr lang="en-US"/>
               <a:t>Fifth level</a:t>
             </a:r>
-            <a:endParaRPr lang="en-US"/>
           </a:p>
         </p:txBody>
       </p:sp>
@@ -2250,7 +2248,7 @@
           <a:p>
             <a:pPr lvl="0"/>
             <a:r>
-              <a:rPr lang="en-US" smtClean="0"/>
+              <a:rPr lang="en-US"/>
               <a:t>Click to edit Master text styles</a:t>
             </a:r>
           </a:p>
@@ -2273,7 +2271,7 @@
           <a:p>
             <a:fld id="{5BCAD085-E8A6-8845-BD4E-CB4CCA059FC4}" type="datetimeFigureOut">
               <a:rPr lang="en-US" smtClean="0"/>
-              <a:t>1/27/13</a:t>
+              <a:t>5/28/26</a:t>
             </a:fld>
             <a:endParaRPr lang="en-US"/>
           </a:p>
@@ -2376,10 +2374,9 @@
           </a:lstStyle>
           <a:p>
             <a:r>
-              <a:rPr lang="en-US" smtClean="0"/>
+              <a:rPr lang="en-US"/>
               <a:t>Click to edit Master title style</a:t>
             </a:r>
-            <a:endParaRPr lang="en-US"/>
           </a:p>
         </p:txBody>
       </p:sp>
@@ -2503,7 +2500,7 @@
           <a:p>
             <a:pPr lvl="0"/>
             <a:r>
-              <a:rPr lang="en-US" smtClean="0"/>
+              <a:rPr lang="en-US"/>
               <a:t>Click to edit Master text styles</a:t>
             </a:r>
           </a:p>
@@ -2526,7 +2523,7 @@
           <a:p>
             <a:fld id="{5BCAD085-E8A6-8845-BD4E-CB4CCA059FC4}" type="datetimeFigureOut">
               <a:rPr lang="en-US" smtClean="0"/>
-              <a:t>1/27/13</a:t>
+              <a:t>5/28/26</a:t>
             </a:fld>
             <a:endParaRPr lang="en-US"/>
           </a:p>
@@ -2635,10 +2632,9 @@
           <a:lstStyle/>
           <a:p>
             <a:r>
-              <a:rPr lang="en-US" smtClean="0"/>
+              <a:rPr lang="en-US"/>
               <a:t>Click to edit Master title style</a:t>
             </a:r>
-            <a:endParaRPr lang="en-US"/>
           </a:p>
         </p:txBody>
       </p:sp>
@@ -2669,38 +2665,37 @@
           <a:p>
             <a:pPr lvl="0"/>
             <a:r>
-              <a:rPr lang="en-US" smtClean="0"/>
+              <a:rPr lang="en-US"/>
               <a:t>Click to edit Master text styles</a:t>
             </a:r>
           </a:p>
           <a:p>
             <a:pPr lvl="1"/>
             <a:r>
-              <a:rPr lang="en-US" smtClean="0"/>
+              <a:rPr lang="en-US"/>
               <a:t>Second level</a:t>
             </a:r>
           </a:p>
           <a:p>
             <a:pPr lvl="2"/>
             <a:r>
-              <a:rPr lang="en-US" smtClean="0"/>
+              <a:rPr lang="en-US"/>
               <a:t>Third level</a:t>
             </a:r>
           </a:p>
           <a:p>
             <a:pPr lvl="3"/>
             <a:r>
-              <a:rPr lang="en-US" smtClean="0"/>
+              <a:rPr lang="en-US"/>
               <a:t>Fourth level</a:t>
             </a:r>
           </a:p>
           <a:p>
             <a:pPr lvl="4"/>
             <a:r>
-              <a:rPr lang="en-US" smtClean="0"/>
+              <a:rPr lang="en-US"/>
               <a:t>Fifth level</a:t>
             </a:r>
-            <a:endParaRPr lang="en-US"/>
           </a:p>
         </p:txBody>
       </p:sp>
@@ -2739,7 +2734,7 @@
           <a:p>
             <a:fld id="{5BCAD085-E8A6-8845-BD4E-CB4CCA059FC4}" type="datetimeFigureOut">
               <a:rPr lang="en-US" smtClean="0"/>
-              <a:t>1/27/13</a:t>
+              <a:t>5/28/26</a:t>
             </a:fld>
             <a:endParaRPr lang="en-US"/>
           </a:p>
@@ -3098,7 +3093,7 @@
 </file>
 
 <file path=ppt/slides/slide1.xml><?xml version="1.0" encoding="utf-8"?>
-<p:sld xmlns:a="http://schemas.openxmlformats.org/drawingml/2006/main" xmlns:p="http://schemas.openxmlformats.org/presentationml/2006/main" xmlns:r="http://schemas.openxmlformats.org/officeDocument/2006/relationships">
+<p:sld xmlns:a="http://schemas.openxmlformats.org/drawingml/2006/main" xmlns:r="http://schemas.openxmlformats.org/officeDocument/2006/relationships" xmlns:p="http://schemas.openxmlformats.org/presentationml/2006/main">
   <p:cSld>
     <p:bg>
       <p:bgPr>
@@ -3114,7 +3109,14 @@
         <p:cNvGrpSpPr/>
         <p:nvPr/>
       </p:nvGrpSpPr>
-      <p:grpSpPr/>
+      <p:grpSpPr>
+        <a:xfrm>
+          <a:off x="0" y="0"/>
+          <a:ext cx="0" cy="0"/>
+          <a:chOff x="0" y="0"/>
+          <a:chExt cx="0" cy="0"/>
+        </a:xfrm>
+      </p:grpSpPr>
       <p:sp>
         <p:nvSpPr>
           <p:cNvPr id="2" name="Rectangle 1"/>
@@ -3155,6 +3157,7 @@
           <a:lstStyle/>
           <a:p>
             <a:pPr algn="ctr"/>
+            <a:endParaRPr/>
           </a:p>
         </p:txBody>
       </p:sp>
@@ -3198,6 +3201,7 @@
           <a:lstStyle/>
           <a:p>
             <a:pPr algn="ctr"/>
+            <a:endParaRPr/>
           </a:p>
         </p:txBody>
       </p:sp>
@@ -3327,8 +3331,10 @@
               </a:defRPr>
             </a:pPr>
             <a:r>
+              <a:rPr dirty="0" err="1"/>
               <a:t>答辩人：孟达</a:t>
             </a:r>
+            <a:endParaRPr dirty="0"/>
           </a:p>
           <a:p>
             <a:pPr algn="l">
@@ -3349,8 +3355,18 @@
               </a:defRPr>
             </a:pPr>
             <a:r>
-              <a:t>学  院：建筑工程学院</a:t>
-            </a:r>
+              <a:rPr dirty="0" err="1"/>
+              <a:t>学</a:t>
+            </a:r>
+            <a:r>
+              <a:rPr dirty="0"/>
+              <a:t>  </a:t>
+            </a:r>
+            <a:r>
+              <a:rPr dirty="0" err="1"/>
+              <a:t>院：建筑工程学院</a:t>
+            </a:r>
+            <a:endParaRPr dirty="0"/>
           </a:p>
           <a:p>
             <a:pPr algn="l">
@@ -3371,8 +3387,18 @@
               </a:defRPr>
             </a:pPr>
             <a:r>
-              <a:t>专  业：船舶与海洋工程</a:t>
-            </a:r>
+              <a:rPr dirty="0" err="1"/>
+              <a:t>专</a:t>
+            </a:r>
+            <a:r>
+              <a:rPr dirty="0"/>
+              <a:t>  </a:t>
+            </a:r>
+            <a:r>
+              <a:rPr dirty="0" err="1"/>
+              <a:t>业：船舶与海洋工程</a:t>
+            </a:r>
+            <a:endParaRPr dirty="0"/>
           </a:p>
           <a:p>
             <a:pPr algn="l">
@@ -3393,7 +3419,12 @@
               </a:defRPr>
             </a:pPr>
             <a:r>
-              <a:t>学  号：3022205024</a:t>
+              <a:rPr dirty="0" err="1"/>
+              <a:t>学</a:t>
+            </a:r>
+            <a:r>
+              <a:rPr dirty="0"/>
+              <a:t>  号：3022205024</a:t>
             </a:r>
           </a:p>
           <a:p>
@@ -3415,8 +3446,18 @@
               </a:defRPr>
             </a:pPr>
             <a:r>
-              <a:t>导  师：顾鹏 讲师</a:t>
-            </a:r>
+              <a:rPr dirty="0" err="1"/>
+              <a:t>导</a:t>
+            </a:r>
+            <a:r>
+              <a:rPr dirty="0"/>
+              <a:t>  </a:t>
+            </a:r>
+            <a:r>
+              <a:rPr dirty="0" err="1"/>
+              <a:t>师：顾鹏</a:t>
+            </a:r>
+            <a:endParaRPr dirty="0"/>
           </a:p>
         </p:txBody>
       </p:sp>
@@ -3460,6 +3501,7 @@
           <a:lstStyle/>
           <a:p>
             <a:pPr algn="ctr"/>
+            <a:endParaRPr/>
           </a:p>
         </p:txBody>
       </p:sp>
@@ -3472,7 +3514,7 @@
 </file>
 
 <file path=ppt/slides/slide10.xml><?xml version="1.0" encoding="utf-8"?>
-<p:sld xmlns:a="http://schemas.openxmlformats.org/drawingml/2006/main" xmlns:p="http://schemas.openxmlformats.org/presentationml/2006/main" xmlns:r="http://schemas.openxmlformats.org/officeDocument/2006/relationships">
+<p:sld xmlns:a="http://schemas.openxmlformats.org/drawingml/2006/main" xmlns:r="http://schemas.openxmlformats.org/officeDocument/2006/relationships" xmlns:p="http://schemas.openxmlformats.org/presentationml/2006/main">
   <p:cSld>
     <p:bg>
       <p:bgPr>
@@ -3488,7 +3530,14 @@
         <p:cNvGrpSpPr/>
         <p:nvPr/>
       </p:nvGrpSpPr>
-      <p:grpSpPr/>
+      <p:grpSpPr>
+        <a:xfrm>
+          <a:off x="0" y="0"/>
+          <a:ext cx="0" cy="0"/>
+          <a:chOff x="0" y="0"/>
+          <a:chExt cx="0" cy="0"/>
+        </a:xfrm>
+      </p:grpSpPr>
       <p:sp>
         <p:nvSpPr>
           <p:cNvPr id="2" name="Rectangle 1"/>
@@ -3529,6 +3578,7 @@
           <a:lstStyle/>
           <a:p>
             <a:pPr algn="ctr"/>
+            <a:endParaRPr/>
           </a:p>
         </p:txBody>
       </p:sp>
@@ -3652,6 +3702,7 @@
           <a:lstStyle/>
           <a:p>
             <a:pPr algn="ctr"/>
+            <a:endParaRPr/>
           </a:p>
         </p:txBody>
       </p:sp>
@@ -3972,6 +4023,7 @@
           <a:lstStyle/>
           <a:p>
             <a:pPr algn="ctr"/>
+            <a:endParaRPr/>
           </a:p>
         </p:txBody>
       </p:sp>
@@ -4186,6 +4238,7 @@
           <a:lstStyle/>
           <a:p>
             <a:pPr algn="ctr"/>
+            <a:endParaRPr/>
           </a:p>
         </p:txBody>
       </p:sp>
@@ -4400,6 +4453,7 @@
           <a:lstStyle/>
           <a:p>
             <a:pPr algn="ctr"/>
+            <a:endParaRPr/>
           </a:p>
         </p:txBody>
       </p:sp>
@@ -4491,6 +4545,7 @@
           <a:lstStyle/>
           <a:p>
             <a:pPr algn="ctr"/>
+            <a:endParaRPr/>
           </a:p>
         </p:txBody>
       </p:sp>
@@ -4543,7 +4598,7 @@
 </file>
 
 <file path=ppt/slides/slide11.xml><?xml version="1.0" encoding="utf-8"?>
-<p:sld xmlns:a="http://schemas.openxmlformats.org/drawingml/2006/main" xmlns:p="http://schemas.openxmlformats.org/presentationml/2006/main" xmlns:r="http://schemas.openxmlformats.org/officeDocument/2006/relationships">
+<p:sld xmlns:a="http://schemas.openxmlformats.org/drawingml/2006/main" xmlns:r="http://schemas.openxmlformats.org/officeDocument/2006/relationships" xmlns:p="http://schemas.openxmlformats.org/presentationml/2006/main">
   <p:cSld>
     <p:bg>
       <p:bgPr>
@@ -4559,7 +4614,14 @@
         <p:cNvGrpSpPr/>
         <p:nvPr/>
       </p:nvGrpSpPr>
-      <p:grpSpPr/>
+      <p:grpSpPr>
+        <a:xfrm>
+          <a:off x="0" y="0"/>
+          <a:ext cx="0" cy="0"/>
+          <a:chOff x="0" y="0"/>
+          <a:chExt cx="0" cy="0"/>
+        </a:xfrm>
+      </p:grpSpPr>
       <p:sp>
         <p:nvSpPr>
           <p:cNvPr id="2" name="Rectangle 1"/>
@@ -4600,6 +4662,7 @@
           <a:lstStyle/>
           <a:p>
             <a:pPr algn="ctr"/>
+            <a:endParaRPr/>
           </a:p>
         </p:txBody>
       </p:sp>
@@ -4723,6 +4786,7 @@
           <a:lstStyle/>
           <a:p>
             <a:pPr algn="ctr"/>
+            <a:endParaRPr/>
           </a:p>
         </p:txBody>
       </p:sp>
@@ -4766,6 +4830,7 @@
           <a:lstStyle/>
           <a:p>
             <a:pPr algn="ctr"/>
+            <a:endParaRPr/>
           </a:p>
         </p:txBody>
       </p:sp>
@@ -4897,6 +4962,7 @@
           <a:lstStyle/>
           <a:p>
             <a:pPr algn="ctr"/>
+            <a:endParaRPr/>
           </a:p>
         </p:txBody>
       </p:sp>
@@ -5028,6 +5094,7 @@
           <a:lstStyle/>
           <a:p>
             <a:pPr algn="ctr"/>
+            <a:endParaRPr/>
           </a:p>
         </p:txBody>
       </p:sp>
@@ -5163,6 +5230,7 @@
           <a:lstStyle/>
           <a:p>
             <a:pPr algn="ctr"/>
+            <a:endParaRPr/>
           </a:p>
         </p:txBody>
       </p:sp>
@@ -5298,6 +5366,7 @@
           <a:lstStyle/>
           <a:p>
             <a:pPr algn="ctr"/>
+            <a:endParaRPr/>
           </a:p>
         </p:txBody>
       </p:sp>
@@ -5349,7 +5418,7 @@
         </p:nvSpPr>
         <p:spPr>
           <a:xfrm>
-            <a:off x="640080" y="5303520"/>
+            <a:off x="640080" y="5143500"/>
             <a:ext cx="10881360" cy="365760"/>
           </a:xfrm>
           <a:prstGeom prst="rect">
@@ -5389,7 +5458,7 @@
         </p:nvSpPr>
         <p:spPr>
           <a:xfrm>
-            <a:off x="640080" y="5669280"/>
+            <a:off x="640080" y="5417820"/>
             <a:ext cx="10881360" cy="914400"/>
           </a:xfrm>
           <a:prstGeom prst="rect">
@@ -5419,8 +5488,22 @@
               </a:defRPr>
             </a:pPr>
             <a:r>
-              <a:t>● 随机种子固定 (seed=42)：保证数据划分和初始化可复现</a:t>
-            </a:r>
+              <a:rPr dirty="0"/>
+              <a:t>● </a:t>
+            </a:r>
+            <a:r>
+              <a:rPr dirty="0" err="1"/>
+              <a:t>随机种子固定</a:t>
+            </a:r>
+            <a:r>
+              <a:rPr dirty="0"/>
+              <a:t> (seed=42)：</a:t>
+            </a:r>
+            <a:r>
+              <a:rPr dirty="0" err="1"/>
+              <a:t>保证数据划分和初始化可复现</a:t>
+            </a:r>
+            <a:endParaRPr dirty="0"/>
           </a:p>
           <a:p>
             <a:pPr algn="l">
@@ -5441,8 +5524,14 @@
               </a:defRPr>
             </a:pPr>
             <a:r>
-              <a:t>● 文件级划分：同一原始文件的片段全部归入同一数据子集</a:t>
-            </a:r>
+              <a:rPr dirty="0"/>
+              <a:t>● </a:t>
+            </a:r>
+            <a:r>
+              <a:rPr dirty="0" err="1"/>
+              <a:t>文件级划分：同一原始文件的片段全部归入同一数据子集</a:t>
+            </a:r>
+            <a:endParaRPr dirty="0"/>
           </a:p>
           <a:p>
             <a:pPr algn="l">
@@ -5463,8 +5552,30 @@
               </a:defRPr>
             </a:pPr>
             <a:r>
-              <a:t>● 分类以验证集 Accuracy 选模型，回归以验证集 MAE 选模型</a:t>
-            </a:r>
+              <a:rPr dirty="0"/>
+              <a:t>● </a:t>
+            </a:r>
+            <a:r>
+              <a:rPr dirty="0" err="1"/>
+              <a:t>分类以验证集</a:t>
+            </a:r>
+            <a:r>
+              <a:rPr dirty="0"/>
+              <a:t> Accuracy </a:t>
+            </a:r>
+            <a:r>
+              <a:rPr dirty="0" err="1"/>
+              <a:t>选模型，回归以验证集</a:t>
+            </a:r>
+            <a:r>
+              <a:rPr dirty="0"/>
+              <a:t> MAE </a:t>
+            </a:r>
+            <a:r>
+              <a:rPr dirty="0" err="1"/>
+              <a:t>选模型</a:t>
+            </a:r>
+            <a:endParaRPr dirty="0"/>
           </a:p>
           <a:p>
             <a:pPr algn="l">
@@ -5485,8 +5596,14 @@
               </a:defRPr>
             </a:pPr>
             <a:r>
-              <a:t>● 统一框架：配置文件区分任务类型，训练器代码完全复用</a:t>
-            </a:r>
+              <a:rPr dirty="0"/>
+              <a:t>● </a:t>
+            </a:r>
+            <a:r>
+              <a:rPr dirty="0" err="1"/>
+              <a:t>统一框架：配置文件区分任务类型，训练器代码完全复用</a:t>
+            </a:r>
+            <a:endParaRPr dirty="0"/>
           </a:p>
         </p:txBody>
       </p:sp>
@@ -5530,6 +5647,7 @@
           <a:lstStyle/>
           <a:p>
             <a:pPr algn="ctr"/>
+            <a:endParaRPr/>
           </a:p>
         </p:txBody>
       </p:sp>
@@ -5582,7 +5700,7 @@
 </file>
 
 <file path=ppt/slides/slide12.xml><?xml version="1.0" encoding="utf-8"?>
-<p:sld xmlns:a="http://schemas.openxmlformats.org/drawingml/2006/main" xmlns:p="http://schemas.openxmlformats.org/presentationml/2006/main" xmlns:r="http://schemas.openxmlformats.org/officeDocument/2006/relationships">
+<p:sld xmlns:a="http://schemas.openxmlformats.org/drawingml/2006/main" xmlns:r="http://schemas.openxmlformats.org/officeDocument/2006/relationships" xmlns:p="http://schemas.openxmlformats.org/presentationml/2006/main">
   <p:cSld>
     <p:bg>
       <p:bgPr>
@@ -5598,7 +5716,14 @@
         <p:cNvGrpSpPr/>
         <p:nvPr/>
       </p:nvGrpSpPr>
-      <p:grpSpPr/>
+      <p:grpSpPr>
+        <a:xfrm>
+          <a:off x="0" y="0"/>
+          <a:ext cx="0" cy="0"/>
+          <a:chOff x="0" y="0"/>
+          <a:chExt cx="0" cy="0"/>
+        </a:xfrm>
+      </p:grpSpPr>
       <p:sp>
         <p:nvSpPr>
           <p:cNvPr id="2" name="Rectangle 1"/>
@@ -5639,6 +5764,7 @@
           <a:lstStyle/>
           <a:p>
             <a:pPr algn="ctr"/>
+            <a:endParaRPr/>
           </a:p>
         </p:txBody>
       </p:sp>
@@ -5762,6 +5888,7 @@
           <a:lstStyle/>
           <a:p>
             <a:pPr algn="ctr"/>
+            <a:endParaRPr/>
           </a:p>
         </p:txBody>
       </p:sp>
@@ -5805,6 +5932,7 @@
           <a:lstStyle/>
           <a:p>
             <a:pPr algn="ctr"/>
+            <a:endParaRPr/>
           </a:p>
         </p:txBody>
       </p:sp>
@@ -5997,6 +6125,7 @@
           <a:lstStyle/>
           <a:p>
             <a:pPr algn="ctr"/>
+            <a:endParaRPr/>
           </a:p>
         </p:txBody>
       </p:sp>
@@ -6229,6 +6358,7 @@
           <a:lstStyle/>
           <a:p>
             <a:pPr algn="ctr"/>
+            <a:endParaRPr/>
           </a:p>
         </p:txBody>
       </p:sp>
@@ -6356,6 +6486,7 @@
           <a:lstStyle/>
           <a:p>
             <a:pPr algn="ctr"/>
+            <a:endParaRPr/>
           </a:p>
         </p:txBody>
       </p:sp>
@@ -6483,6 +6614,7 @@
           <a:lstStyle/>
           <a:p>
             <a:pPr algn="ctr"/>
+            <a:endParaRPr/>
           </a:p>
         </p:txBody>
       </p:sp>
@@ -6610,6 +6742,7 @@
           <a:lstStyle/>
           <a:p>
             <a:pPr algn="ctr"/>
+            <a:endParaRPr/>
           </a:p>
         </p:txBody>
       </p:sp>
@@ -6737,6 +6870,7 @@
           <a:lstStyle/>
           <a:p>
             <a:pPr algn="ctr"/>
+            <a:endParaRPr/>
           </a:p>
         </p:txBody>
       </p:sp>
@@ -6845,6 +6979,7 @@
           <a:lstStyle/>
           <a:p>
             <a:pPr algn="ctr"/>
+            <a:endParaRPr/>
           </a:p>
         </p:txBody>
       </p:sp>
@@ -6897,7 +7032,7 @@
 </file>
 
 <file path=ppt/slides/slide13.xml><?xml version="1.0" encoding="utf-8"?>
-<p:sld xmlns:a="http://schemas.openxmlformats.org/drawingml/2006/main" xmlns:p="http://schemas.openxmlformats.org/presentationml/2006/main" xmlns:r="http://schemas.openxmlformats.org/officeDocument/2006/relationships">
+<p:sld xmlns:a="http://schemas.openxmlformats.org/drawingml/2006/main" xmlns:r="http://schemas.openxmlformats.org/officeDocument/2006/relationships" xmlns:p="http://schemas.openxmlformats.org/presentationml/2006/main">
   <p:cSld>
     <p:bg>
       <p:bgPr>
@@ -6913,7 +7048,14 @@
         <p:cNvGrpSpPr/>
         <p:nvPr/>
       </p:nvGrpSpPr>
-      <p:grpSpPr/>
+      <p:grpSpPr>
+        <a:xfrm>
+          <a:off x="0" y="0"/>
+          <a:ext cx="0" cy="0"/>
+          <a:chOff x="0" y="0"/>
+          <a:chExt cx="0" cy="0"/>
+        </a:xfrm>
+      </p:grpSpPr>
       <p:sp>
         <p:nvSpPr>
           <p:cNvPr id="2" name="Rectangle 1"/>
@@ -6954,6 +7096,7 @@
           <a:lstStyle/>
           <a:p>
             <a:pPr algn="ctr"/>
+            <a:endParaRPr/>
           </a:p>
         </p:txBody>
       </p:sp>
@@ -7077,6 +7220,7 @@
           <a:lstStyle/>
           <a:p>
             <a:pPr algn="ctr"/>
+            <a:endParaRPr/>
           </a:p>
         </p:txBody>
       </p:sp>
@@ -7160,6 +7304,7 @@
           <a:lstStyle/>
           <a:p>
             <a:pPr algn="ctr"/>
+            <a:endParaRPr/>
           </a:p>
         </p:txBody>
       </p:sp>
@@ -7243,6 +7388,7 @@
           <a:lstStyle/>
           <a:p>
             <a:pPr algn="ctr"/>
+            <a:endParaRPr/>
           </a:p>
         </p:txBody>
       </p:sp>
@@ -7326,6 +7472,7 @@
           <a:lstStyle/>
           <a:p>
             <a:pPr algn="ctr"/>
+            <a:endParaRPr/>
           </a:p>
         </p:txBody>
       </p:sp>
@@ -7409,6 +7556,7 @@
           <a:lstStyle/>
           <a:p>
             <a:pPr algn="ctr"/>
+            <a:endParaRPr/>
           </a:p>
         </p:txBody>
       </p:sp>
@@ -7492,6 +7640,7 @@
           <a:lstStyle/>
           <a:p>
             <a:pPr algn="ctr"/>
+            <a:endParaRPr/>
           </a:p>
         </p:txBody>
       </p:sp>
@@ -7575,6 +7724,7 @@
           <a:lstStyle/>
           <a:p>
             <a:pPr algn="ctr"/>
+            <a:endParaRPr/>
           </a:p>
         </p:txBody>
       </p:sp>
@@ -7658,6 +7808,7 @@
           <a:lstStyle/>
           <a:p>
             <a:pPr algn="ctr"/>
+            <a:endParaRPr/>
           </a:p>
         </p:txBody>
       </p:sp>
@@ -7741,6 +7892,7 @@
           <a:lstStyle/>
           <a:p>
             <a:pPr algn="ctr"/>
+            <a:endParaRPr/>
           </a:p>
         </p:txBody>
       </p:sp>
@@ -7824,6 +7976,7 @@
           <a:lstStyle/>
           <a:p>
             <a:pPr algn="ctr"/>
+            <a:endParaRPr/>
           </a:p>
         </p:txBody>
       </p:sp>
@@ -8051,8 +8204,10 @@
               </a:defRPr>
             </a:pPr>
             <a:r>
+              <a:rPr dirty="0" err="1"/>
               <a:t>传统基线对比</a:t>
             </a:r>
+            <a:endParaRPr dirty="0"/>
           </a:p>
         </p:txBody>
       </p:sp>
@@ -8096,6 +8251,7 @@
           <a:lstStyle/>
           <a:p>
             <a:pPr algn="ctr"/>
+            <a:endParaRPr/>
           </a:p>
         </p:txBody>
       </p:sp>
@@ -8134,8 +8290,10 @@
               </a:defRPr>
             </a:pPr>
             <a:r>
+              <a:rPr dirty="0" err="1"/>
               <a:t>方法</a:t>
             </a:r>
+            <a:endParaRPr dirty="0"/>
           </a:p>
         </p:txBody>
       </p:sp>
@@ -8179,6 +8337,7 @@
           <a:lstStyle/>
           <a:p>
             <a:pPr algn="ctr"/>
+            <a:endParaRPr/>
           </a:p>
         </p:txBody>
       </p:sp>
@@ -8262,6 +8421,7 @@
           <a:lstStyle/>
           <a:p>
             <a:pPr algn="ctr"/>
+            <a:endParaRPr/>
           </a:p>
         </p:txBody>
       </p:sp>
@@ -8345,6 +8505,7 @@
           <a:lstStyle/>
           <a:p>
             <a:pPr algn="ctr"/>
+            <a:endParaRPr/>
           </a:p>
         </p:txBody>
       </p:sp>
@@ -8397,7 +8558,7 @@
         <p:spPr>
           <a:xfrm>
             <a:off x="11338560" y="1828800"/>
-            <a:ext cx="1188720" cy="393192"/>
+            <a:ext cx="853440" cy="393192"/>
           </a:xfrm>
           <a:prstGeom prst="rect">
             <a:avLst/>
@@ -8428,6 +8589,7 @@
           <a:lstStyle/>
           <a:p>
             <a:pPr algn="ctr"/>
+            <a:endParaRPr/>
           </a:p>
         </p:txBody>
       </p:sp>
@@ -8440,7 +8602,7 @@
         <p:spPr>
           <a:xfrm>
             <a:off x="11384280" y="1874520"/>
-            <a:ext cx="1097280" cy="301752"/>
+            <a:ext cx="692106" cy="301752"/>
           </a:xfrm>
           <a:prstGeom prst="rect">
             <a:avLst/>
@@ -8511,6 +8673,7 @@
           <a:lstStyle/>
           <a:p>
             <a:pPr algn="ctr"/>
+            <a:endParaRPr/>
           </a:p>
         </p:txBody>
       </p:sp>
@@ -8594,6 +8757,7 @@
           <a:lstStyle/>
           <a:p>
             <a:pPr algn="ctr"/>
+            <a:endParaRPr/>
           </a:p>
         </p:txBody>
       </p:sp>
@@ -8677,6 +8841,7 @@
           <a:lstStyle/>
           <a:p>
             <a:pPr algn="ctr"/>
+            <a:endParaRPr/>
           </a:p>
         </p:txBody>
       </p:sp>
@@ -8760,6 +8925,7 @@
           <a:lstStyle/>
           <a:p>
             <a:pPr algn="ctr"/>
+            <a:endParaRPr/>
           </a:p>
         </p:txBody>
       </p:sp>
@@ -8812,7 +8978,7 @@
         <p:spPr>
           <a:xfrm>
             <a:off x="11338560" y="2267712"/>
-            <a:ext cx="1188720" cy="393192"/>
+            <a:ext cx="853440" cy="393192"/>
           </a:xfrm>
           <a:prstGeom prst="rect">
             <a:avLst/>
@@ -8843,6 +9009,7 @@
           <a:lstStyle/>
           <a:p>
             <a:pPr algn="ctr"/>
+            <a:endParaRPr/>
           </a:p>
         </p:txBody>
       </p:sp>
@@ -8855,7 +9022,7 @@
         <p:spPr>
           <a:xfrm>
             <a:off x="11384280" y="2313432"/>
-            <a:ext cx="1097280" cy="301752"/>
+            <a:ext cx="692106" cy="301752"/>
           </a:xfrm>
           <a:prstGeom prst="rect">
             <a:avLst/>
@@ -8926,6 +9093,7 @@
           <a:lstStyle/>
           <a:p>
             <a:pPr algn="ctr"/>
+            <a:endParaRPr/>
           </a:p>
         </p:txBody>
       </p:sp>
@@ -9009,6 +9177,7 @@
           <a:lstStyle/>
           <a:p>
             <a:pPr algn="ctr"/>
+            <a:endParaRPr/>
           </a:p>
         </p:txBody>
       </p:sp>
@@ -9047,6 +9216,7 @@
               </a:defRPr>
             </a:pPr>
             <a:r>
+              <a:rPr dirty="0"/>
               <a:t>0.9300</a:t>
             </a:r>
           </a:p>
@@ -9092,6 +9262,7 @@
           <a:lstStyle/>
           <a:p>
             <a:pPr algn="ctr"/>
+            <a:endParaRPr/>
           </a:p>
         </p:txBody>
       </p:sp>
@@ -9175,6 +9346,7 @@
           <a:lstStyle/>
           <a:p>
             <a:pPr algn="ctr"/>
+            <a:endParaRPr/>
           </a:p>
         </p:txBody>
       </p:sp>
@@ -9227,7 +9399,7 @@
         <p:spPr>
           <a:xfrm>
             <a:off x="11338560" y="2706624"/>
-            <a:ext cx="1188720" cy="393192"/>
+            <a:ext cx="853135" cy="393192"/>
           </a:xfrm>
           <a:prstGeom prst="rect">
             <a:avLst/>
@@ -9258,6 +9430,7 @@
           <a:lstStyle/>
           <a:p>
             <a:pPr algn="ctr"/>
+            <a:endParaRPr/>
           </a:p>
         </p:txBody>
       </p:sp>
@@ -9270,7 +9443,7 @@
         <p:spPr>
           <a:xfrm>
             <a:off x="11384280" y="2752344"/>
-            <a:ext cx="1097280" cy="301752"/>
+            <a:ext cx="692106" cy="301752"/>
           </a:xfrm>
           <a:prstGeom prst="rect">
             <a:avLst/>
@@ -9341,6 +9514,7 @@
           <a:lstStyle/>
           <a:p>
             <a:pPr algn="ctr"/>
+            <a:endParaRPr/>
           </a:p>
         </p:txBody>
       </p:sp>
@@ -9424,6 +9598,7 @@
           <a:lstStyle/>
           <a:p>
             <a:pPr algn="ctr"/>
+            <a:endParaRPr/>
           </a:p>
         </p:txBody>
       </p:sp>
@@ -9507,6 +9682,7 @@
           <a:lstStyle/>
           <a:p>
             <a:pPr algn="ctr"/>
+            <a:endParaRPr/>
           </a:p>
         </p:txBody>
       </p:sp>
@@ -9590,6 +9766,7 @@
           <a:lstStyle/>
           <a:p>
             <a:pPr algn="ctr"/>
+            <a:endParaRPr/>
           </a:p>
         </p:txBody>
       </p:sp>
@@ -9642,7 +9819,7 @@
         <p:spPr>
           <a:xfrm>
             <a:off x="11338560" y="3145536"/>
-            <a:ext cx="1188720" cy="393192"/>
+            <a:ext cx="853135" cy="393192"/>
           </a:xfrm>
           <a:prstGeom prst="rect">
             <a:avLst/>
@@ -9673,6 +9850,7 @@
           <a:lstStyle/>
           <a:p>
             <a:pPr algn="ctr"/>
+            <a:endParaRPr/>
           </a:p>
         </p:txBody>
       </p:sp>
@@ -9685,7 +9863,7 @@
         <p:spPr>
           <a:xfrm>
             <a:off x="11384280" y="3191256"/>
-            <a:ext cx="1097280" cy="301752"/>
+            <a:ext cx="692106" cy="301752"/>
           </a:xfrm>
           <a:prstGeom prst="rect">
             <a:avLst/>
@@ -9756,6 +9934,7 @@
           <a:lstStyle/>
           <a:p>
             <a:pPr algn="ctr"/>
+            <a:endParaRPr/>
           </a:p>
         </p:txBody>
       </p:sp>
@@ -9839,6 +10018,7 @@
           <a:lstStyle/>
           <a:p>
             <a:pPr algn="ctr"/>
+            <a:endParaRPr/>
           </a:p>
         </p:txBody>
       </p:sp>
@@ -9922,6 +10102,7 @@
           <a:lstStyle/>
           <a:p>
             <a:pPr algn="ctr"/>
+            <a:endParaRPr/>
           </a:p>
         </p:txBody>
       </p:sp>
@@ -10005,6 +10186,7 @@
           <a:lstStyle/>
           <a:p>
             <a:pPr algn="ctr"/>
+            <a:endParaRPr/>
           </a:p>
         </p:txBody>
       </p:sp>
@@ -10057,7 +10239,7 @@
         <p:spPr>
           <a:xfrm>
             <a:off x="11338560" y="3584448"/>
-            <a:ext cx="1188720" cy="393192"/>
+            <a:ext cx="853135" cy="393192"/>
           </a:xfrm>
           <a:prstGeom prst="rect">
             <a:avLst/>
@@ -10088,6 +10270,7 @@
           <a:lstStyle/>
           <a:p>
             <a:pPr algn="ctr"/>
+            <a:endParaRPr/>
           </a:p>
         </p:txBody>
       </p:sp>
@@ -10100,7 +10283,7 @@
         <p:spPr>
           <a:xfrm>
             <a:off x="11384280" y="3630168"/>
-            <a:ext cx="1097280" cy="301752"/>
+            <a:ext cx="692106" cy="301752"/>
           </a:xfrm>
           <a:prstGeom prst="rect">
             <a:avLst/>
@@ -10140,7 +10323,7 @@
         <p:spPr>
           <a:xfrm>
             <a:off x="6400800" y="4206240"/>
-            <a:ext cx="5212080" cy="1463040"/>
+            <a:ext cx="5212080" cy="1828800"/>
           </a:xfrm>
           <a:prstGeom prst="rect">
             <a:avLst/>
@@ -10171,6 +10354,7 @@
           <a:lstStyle/>
           <a:p>
             <a:pPr algn="ctr"/>
+            <a:endParaRPr/>
           </a:p>
         </p:txBody>
       </p:sp>
@@ -10212,7 +10396,12 @@
               </a:defRPr>
             </a:pPr>
             <a:r>
-              <a:t>💡 关键发现：</a:t>
+              <a:rPr dirty="0" err="1"/>
+              <a:t>关键发现</a:t>
+            </a:r>
+            <a:r>
+              <a:rPr dirty="0"/>
+              <a:t>：</a:t>
             </a:r>
           </a:p>
           <a:p>
@@ -10234,8 +10423,14 @@
               </a:defRPr>
             </a:pPr>
             <a:r>
-              <a:t>① CNN 片段级优于传统方法，端到端学习</a:t>
-            </a:r>
+              <a:rPr dirty="0"/>
+              <a:t>① CNN </a:t>
+            </a:r>
+            <a:r>
+              <a:rPr dirty="0" err="1"/>
+              <a:t>片段级优于传统方法，端到端学习</a:t>
+            </a:r>
+            <a:endParaRPr dirty="0"/>
           </a:p>
           <a:p>
             <a:pPr algn="l">
@@ -10256,8 +10451,14 @@
               </a:defRPr>
             </a:pPr>
             <a:r>
-              <a:t>   对单片段判别有收益</a:t>
-            </a:r>
+              <a:rPr dirty="0"/>
+              <a:t>   </a:t>
+            </a:r>
+            <a:r>
+              <a:rPr dirty="0" err="1"/>
+              <a:t>对单片段判别有收益</a:t>
+            </a:r>
+            <a:endParaRPr dirty="0"/>
           </a:p>
           <a:p>
             <a:pPr algn="l">
@@ -10278,7 +10479,24 @@
               </a:defRPr>
             </a:pPr>
             <a:r>
-              <a:t>② 文件级 SVM 达 1.000，说明文件级可分性强</a:t>
+              <a:rPr dirty="0"/>
+              <a:t>② </a:t>
+            </a:r>
+            <a:r>
+              <a:rPr dirty="0" err="1"/>
+              <a:t>文件级</a:t>
+            </a:r>
+            <a:r>
+              <a:rPr dirty="0"/>
+              <a:t> SVM </a:t>
+            </a:r>
+            <a:r>
+              <a:rPr dirty="0" err="1"/>
+              <a:t>达</a:t>
+            </a:r>
+            <a:r>
+              <a:rPr dirty="0"/>
+              <a:t> 1.000，说明文件级可分性强</a:t>
             </a:r>
           </a:p>
           <a:p>
@@ -10300,8 +10518,14 @@
               </a:defRPr>
             </a:pPr>
             <a:r>
-              <a:t>③ 分类数据中统计特征已含明显判别信息</a:t>
-            </a:r>
+              <a:rPr dirty="0"/>
+              <a:t>③ </a:t>
+            </a:r>
+            <a:r>
+              <a:rPr dirty="0" err="1"/>
+              <a:t>分类数据中统计特征已含明显判别信息</a:t>
+            </a:r>
+            <a:endParaRPr dirty="0"/>
           </a:p>
         </p:txBody>
       </p:sp>
@@ -10345,6 +10569,7 @@
           <a:lstStyle/>
           <a:p>
             <a:pPr algn="ctr"/>
+            <a:endParaRPr/>
           </a:p>
         </p:txBody>
       </p:sp>
@@ -10397,7 +10622,7 @@
 </file>
 
 <file path=ppt/slides/slide14.xml><?xml version="1.0" encoding="utf-8"?>
-<p:sld xmlns:a="http://schemas.openxmlformats.org/drawingml/2006/main" xmlns:p="http://schemas.openxmlformats.org/presentationml/2006/main" xmlns:r="http://schemas.openxmlformats.org/officeDocument/2006/relationships">
+<p:sld xmlns:a="http://schemas.openxmlformats.org/drawingml/2006/main" xmlns:r="http://schemas.openxmlformats.org/officeDocument/2006/relationships" xmlns:p="http://schemas.openxmlformats.org/presentationml/2006/main">
   <p:cSld>
     <p:bg>
       <p:bgPr>
@@ -10413,7 +10638,14 @@
         <p:cNvGrpSpPr/>
         <p:nvPr/>
       </p:nvGrpSpPr>
-      <p:grpSpPr/>
+      <p:grpSpPr>
+        <a:xfrm>
+          <a:off x="0" y="0"/>
+          <a:ext cx="0" cy="0"/>
+          <a:chOff x="0" y="0"/>
+          <a:chExt cx="0" cy="0"/>
+        </a:xfrm>
+      </p:grpSpPr>
       <p:sp>
         <p:nvSpPr>
           <p:cNvPr id="2" name="Rectangle 1"/>
@@ -10454,6 +10686,7 @@
           <a:lstStyle/>
           <a:p>
             <a:pPr algn="ctr"/>
+            <a:endParaRPr/>
           </a:p>
         </p:txBody>
       </p:sp>
@@ -10577,6 +10810,7 @@
           <a:lstStyle/>
           <a:p>
             <a:pPr algn="ctr"/>
+            <a:endParaRPr/>
           </a:p>
         </p:txBody>
       </p:sp>
@@ -10629,7 +10863,7 @@
         <p:spPr>
           <a:xfrm>
             <a:off x="914400" y="2011680"/>
-            <a:ext cx="2468880" cy="502920"/>
+            <a:ext cx="1419425" cy="502920"/>
           </a:xfrm>
           <a:prstGeom prst="rect">
             <a:avLst/>
@@ -10660,6 +10894,7 @@
           <a:lstStyle/>
           <a:p>
             <a:pPr algn="ctr"/>
+            <a:endParaRPr/>
           </a:p>
         </p:txBody>
       </p:sp>
@@ -10671,8 +10906,8 @@
         </p:nvSpPr>
         <p:spPr>
           <a:xfrm>
-            <a:off x="1005840" y="2084832"/>
-            <a:ext cx="2286000" cy="356616"/>
+            <a:off x="745441" y="2084832"/>
+            <a:ext cx="1419425" cy="356616"/>
           </a:xfrm>
           <a:prstGeom prst="rect">
             <a:avLst/>
@@ -10711,8 +10946,8 @@
         </p:nvSpPr>
         <p:spPr>
           <a:xfrm>
-            <a:off x="3566160" y="2011680"/>
-            <a:ext cx="2468880" cy="502920"/>
+            <a:off x="3340424" y="2011680"/>
+            <a:ext cx="1532979" cy="502920"/>
           </a:xfrm>
           <a:prstGeom prst="rect">
             <a:avLst/>
@@ -10743,6 +10978,7 @@
           <a:lstStyle/>
           <a:p>
             <a:pPr algn="ctr"/>
+            <a:endParaRPr/>
           </a:p>
         </p:txBody>
       </p:sp>
@@ -10754,8 +10990,8 @@
         </p:nvSpPr>
         <p:spPr>
           <a:xfrm>
-            <a:off x="3657600" y="2084832"/>
-            <a:ext cx="2286000" cy="356616"/>
+            <a:off x="3397201" y="2084832"/>
+            <a:ext cx="1419425" cy="356616"/>
           </a:xfrm>
           <a:prstGeom prst="rect">
             <a:avLst/>
@@ -10794,8 +11030,8 @@
         </p:nvSpPr>
         <p:spPr>
           <a:xfrm>
-            <a:off x="6217920" y="2011680"/>
-            <a:ext cx="2468880" cy="502920"/>
+            <a:off x="5992184" y="2011680"/>
+            <a:ext cx="1532979" cy="502920"/>
           </a:xfrm>
           <a:prstGeom prst="rect">
             <a:avLst/>
@@ -10826,6 +11062,7 @@
           <a:lstStyle/>
           <a:p>
             <a:pPr algn="ctr"/>
+            <a:endParaRPr/>
           </a:p>
         </p:txBody>
       </p:sp>
@@ -10837,8 +11074,8 @@
         </p:nvSpPr>
         <p:spPr>
           <a:xfrm>
-            <a:off x="6309360" y="2084832"/>
-            <a:ext cx="2286000" cy="356616"/>
+            <a:off x="6048961" y="2084832"/>
+            <a:ext cx="1419425" cy="356616"/>
           </a:xfrm>
           <a:prstGeom prst="rect">
             <a:avLst/>
@@ -10877,8 +11114,8 @@
         </p:nvSpPr>
         <p:spPr>
           <a:xfrm>
-            <a:off x="8869680" y="2011680"/>
-            <a:ext cx="2468880" cy="502920"/>
+            <a:off x="8643944" y="2011680"/>
+            <a:ext cx="1532979" cy="502920"/>
           </a:xfrm>
           <a:prstGeom prst="rect">
             <a:avLst/>
@@ -10909,6 +11146,7 @@
           <a:lstStyle/>
           <a:p>
             <a:pPr algn="ctr"/>
+            <a:endParaRPr/>
           </a:p>
         </p:txBody>
       </p:sp>
@@ -10920,8 +11158,8 @@
         </p:nvSpPr>
         <p:spPr>
           <a:xfrm>
-            <a:off x="8961120" y="2084832"/>
-            <a:ext cx="2286000" cy="356616"/>
+            <a:off x="8700721" y="2084832"/>
+            <a:ext cx="1419425" cy="356616"/>
           </a:xfrm>
           <a:prstGeom prst="rect">
             <a:avLst/>
@@ -10960,8 +11198,8 @@
         </p:nvSpPr>
         <p:spPr>
           <a:xfrm>
-            <a:off x="11521440" y="2011680"/>
-            <a:ext cx="2468880" cy="502920"/>
+            <a:off x="11295704" y="2011680"/>
+            <a:ext cx="1532979" cy="502920"/>
           </a:xfrm>
           <a:prstGeom prst="rect">
             <a:avLst/>
@@ -10992,6 +11230,7 @@
           <a:lstStyle/>
           <a:p>
             <a:pPr algn="ctr"/>
+            <a:endParaRPr/>
           </a:p>
         </p:txBody>
       </p:sp>
@@ -11003,8 +11242,8 @@
         </p:nvSpPr>
         <p:spPr>
           <a:xfrm>
-            <a:off x="11612880" y="2084832"/>
-            <a:ext cx="2286000" cy="356616"/>
+            <a:off x="11352481" y="2084832"/>
+            <a:ext cx="1419425" cy="356616"/>
           </a:xfrm>
           <a:prstGeom prst="rect">
             <a:avLst/>
@@ -11044,7 +11283,7 @@
         <p:spPr>
           <a:xfrm>
             <a:off x="914400" y="2606040"/>
-            <a:ext cx="2468880" cy="502920"/>
+            <a:ext cx="1419425" cy="502920"/>
           </a:xfrm>
           <a:prstGeom prst="rect">
             <a:avLst/>
@@ -11075,6 +11314,7 @@
           <a:lstStyle/>
           <a:p>
             <a:pPr algn="ctr"/>
+            <a:endParaRPr/>
           </a:p>
         </p:txBody>
       </p:sp>
@@ -11086,8 +11326,8 @@
         </p:nvSpPr>
         <p:spPr>
           <a:xfrm>
-            <a:off x="1005840" y="2679192"/>
-            <a:ext cx="2286000" cy="356616"/>
+            <a:off x="745441" y="2679192"/>
+            <a:ext cx="1419425" cy="356616"/>
           </a:xfrm>
           <a:prstGeom prst="rect">
             <a:avLst/>
@@ -11126,8 +11366,8 @@
         </p:nvSpPr>
         <p:spPr>
           <a:xfrm>
-            <a:off x="3566160" y="2606040"/>
-            <a:ext cx="2468880" cy="502920"/>
+            <a:off x="3340424" y="2606040"/>
+            <a:ext cx="1532979" cy="502920"/>
           </a:xfrm>
           <a:prstGeom prst="rect">
             <a:avLst/>
@@ -11158,6 +11398,7 @@
           <a:lstStyle/>
           <a:p>
             <a:pPr algn="ctr"/>
+            <a:endParaRPr/>
           </a:p>
         </p:txBody>
       </p:sp>
@@ -11169,8 +11410,8 @@
         </p:nvSpPr>
         <p:spPr>
           <a:xfrm>
-            <a:off x="3657600" y="2679192"/>
-            <a:ext cx="2286000" cy="356616"/>
+            <a:off x="3397201" y="2679192"/>
+            <a:ext cx="1419425" cy="356616"/>
           </a:xfrm>
           <a:prstGeom prst="rect">
             <a:avLst/>
@@ -11209,8 +11450,8 @@
         </p:nvSpPr>
         <p:spPr>
           <a:xfrm>
-            <a:off x="6217920" y="2606040"/>
-            <a:ext cx="2468880" cy="502920"/>
+            <a:off x="5992184" y="2606040"/>
+            <a:ext cx="1532979" cy="502920"/>
           </a:xfrm>
           <a:prstGeom prst="rect">
             <a:avLst/>
@@ -11241,6 +11482,7 @@
           <a:lstStyle/>
           <a:p>
             <a:pPr algn="ctr"/>
+            <a:endParaRPr/>
           </a:p>
         </p:txBody>
       </p:sp>
@@ -11252,8 +11494,8 @@
         </p:nvSpPr>
         <p:spPr>
           <a:xfrm>
-            <a:off x="6309360" y="2679192"/>
-            <a:ext cx="2286000" cy="356616"/>
+            <a:off x="6048961" y="2679192"/>
+            <a:ext cx="1419425" cy="356616"/>
           </a:xfrm>
           <a:prstGeom prst="rect">
             <a:avLst/>
@@ -11292,8 +11534,8 @@
         </p:nvSpPr>
         <p:spPr>
           <a:xfrm>
-            <a:off x="8869680" y="2606040"/>
-            <a:ext cx="2468880" cy="502920"/>
+            <a:off x="8643944" y="2606040"/>
+            <a:ext cx="1532979" cy="502920"/>
           </a:xfrm>
           <a:prstGeom prst="rect">
             <a:avLst/>
@@ -11324,6 +11566,7 @@
           <a:lstStyle/>
           <a:p>
             <a:pPr algn="ctr"/>
+            <a:endParaRPr/>
           </a:p>
         </p:txBody>
       </p:sp>
@@ -11335,8 +11578,8 @@
         </p:nvSpPr>
         <p:spPr>
           <a:xfrm>
-            <a:off x="8961120" y="2679192"/>
-            <a:ext cx="2286000" cy="356616"/>
+            <a:off x="8700721" y="2679192"/>
+            <a:ext cx="1419425" cy="356616"/>
           </a:xfrm>
           <a:prstGeom prst="rect">
             <a:avLst/>
@@ -11375,8 +11618,8 @@
         </p:nvSpPr>
         <p:spPr>
           <a:xfrm>
-            <a:off x="11521440" y="2606040"/>
-            <a:ext cx="2468880" cy="502920"/>
+            <a:off x="11295704" y="2606040"/>
+            <a:ext cx="1532979" cy="502920"/>
           </a:xfrm>
           <a:prstGeom prst="rect">
             <a:avLst/>
@@ -11407,6 +11650,7 @@
           <a:lstStyle/>
           <a:p>
             <a:pPr algn="ctr"/>
+            <a:endParaRPr/>
           </a:p>
         </p:txBody>
       </p:sp>
@@ -11418,8 +11662,8 @@
         </p:nvSpPr>
         <p:spPr>
           <a:xfrm>
-            <a:off x="11612880" y="2679192"/>
-            <a:ext cx="2286000" cy="356616"/>
+            <a:off x="11352481" y="2679192"/>
+            <a:ext cx="1419425" cy="356616"/>
           </a:xfrm>
           <a:prstGeom prst="rect">
             <a:avLst/>
@@ -11459,7 +11703,7 @@
         <p:spPr>
           <a:xfrm>
             <a:off x="914400" y="3200400"/>
-            <a:ext cx="2468880" cy="502920"/>
+            <a:ext cx="1419425" cy="502920"/>
           </a:xfrm>
           <a:prstGeom prst="rect">
             <a:avLst/>
@@ -11490,6 +11734,7 @@
           <a:lstStyle/>
           <a:p>
             <a:pPr algn="ctr"/>
+            <a:endParaRPr/>
           </a:p>
         </p:txBody>
       </p:sp>
@@ -11501,8 +11746,8 @@
         </p:nvSpPr>
         <p:spPr>
           <a:xfrm>
-            <a:off x="1005840" y="3273552"/>
-            <a:ext cx="2286000" cy="356616"/>
+            <a:off x="745441" y="3273552"/>
+            <a:ext cx="1419425" cy="356616"/>
           </a:xfrm>
           <a:prstGeom prst="rect">
             <a:avLst/>
@@ -11541,8 +11786,8 @@
         </p:nvSpPr>
         <p:spPr>
           <a:xfrm>
-            <a:off x="3566160" y="3200400"/>
-            <a:ext cx="2468880" cy="502920"/>
+            <a:off x="3340424" y="3200400"/>
+            <a:ext cx="1532979" cy="502920"/>
           </a:xfrm>
           <a:prstGeom prst="rect">
             <a:avLst/>
@@ -11573,6 +11818,7 @@
           <a:lstStyle/>
           <a:p>
             <a:pPr algn="ctr"/>
+            <a:endParaRPr/>
           </a:p>
         </p:txBody>
       </p:sp>
@@ -11584,8 +11830,8 @@
         </p:nvSpPr>
         <p:spPr>
           <a:xfrm>
-            <a:off x="3657600" y="3273552"/>
-            <a:ext cx="2286000" cy="356616"/>
+            <a:off x="3397201" y="3273552"/>
+            <a:ext cx="1419425" cy="356616"/>
           </a:xfrm>
           <a:prstGeom prst="rect">
             <a:avLst/>
@@ -11624,8 +11870,8 @@
         </p:nvSpPr>
         <p:spPr>
           <a:xfrm>
-            <a:off x="6217920" y="3200400"/>
-            <a:ext cx="2468880" cy="502920"/>
+            <a:off x="5992184" y="3200400"/>
+            <a:ext cx="1532979" cy="502920"/>
           </a:xfrm>
           <a:prstGeom prst="rect">
             <a:avLst/>
@@ -11656,6 +11902,7 @@
           <a:lstStyle/>
           <a:p>
             <a:pPr algn="ctr"/>
+            <a:endParaRPr/>
           </a:p>
         </p:txBody>
       </p:sp>
@@ -11667,8 +11914,8 @@
         </p:nvSpPr>
         <p:spPr>
           <a:xfrm>
-            <a:off x="6309360" y="3273552"/>
-            <a:ext cx="2286000" cy="356616"/>
+            <a:off x="6048961" y="3273552"/>
+            <a:ext cx="1419425" cy="356616"/>
           </a:xfrm>
           <a:prstGeom prst="rect">
             <a:avLst/>
@@ -11707,8 +11954,8 @@
         </p:nvSpPr>
         <p:spPr>
           <a:xfrm>
-            <a:off x="8869680" y="3200400"/>
-            <a:ext cx="2468880" cy="502920"/>
+            <a:off x="8643944" y="3200400"/>
+            <a:ext cx="1532979" cy="502920"/>
           </a:xfrm>
           <a:prstGeom prst="rect">
             <a:avLst/>
@@ -11739,6 +11986,7 @@
           <a:lstStyle/>
           <a:p>
             <a:pPr algn="ctr"/>
+            <a:endParaRPr/>
           </a:p>
         </p:txBody>
       </p:sp>
@@ -11750,8 +11998,8 @@
         </p:nvSpPr>
         <p:spPr>
           <a:xfrm>
-            <a:off x="8961120" y="3273552"/>
-            <a:ext cx="2286000" cy="356616"/>
+            <a:off x="8700721" y="3273552"/>
+            <a:ext cx="1419425" cy="356616"/>
           </a:xfrm>
           <a:prstGeom prst="rect">
             <a:avLst/>
@@ -11790,8 +12038,8 @@
         </p:nvSpPr>
         <p:spPr>
           <a:xfrm>
-            <a:off x="11521440" y="3200400"/>
-            <a:ext cx="2468880" cy="502920"/>
+            <a:off x="11295704" y="3200400"/>
+            <a:ext cx="1532979" cy="502920"/>
           </a:xfrm>
           <a:prstGeom prst="rect">
             <a:avLst/>
@@ -11822,6 +12070,7 @@
           <a:lstStyle/>
           <a:p>
             <a:pPr algn="ctr"/>
+            <a:endParaRPr/>
           </a:p>
         </p:txBody>
       </p:sp>
@@ -11833,8 +12082,8 @@
         </p:nvSpPr>
         <p:spPr>
           <a:xfrm>
-            <a:off x="11612880" y="3273552"/>
-            <a:ext cx="2286000" cy="356616"/>
+            <a:off x="11352481" y="3273552"/>
+            <a:ext cx="1419425" cy="356616"/>
           </a:xfrm>
           <a:prstGeom prst="rect">
             <a:avLst/>
@@ -11873,7 +12122,7 @@
         </p:nvSpPr>
         <p:spPr>
           <a:xfrm>
-            <a:off x="1371600" y="3383280"/>
+            <a:off x="1325880" y="3611880"/>
             <a:ext cx="9144000" cy="1097280"/>
           </a:xfrm>
           <a:prstGeom prst="rect">
@@ -11903,7 +12152,24 @@
               </a:defRPr>
             </a:pPr>
             <a:r>
-              <a:t>Conformer 片段级 Accuracy 提升: 0.9415 → 0.9900 (+5.2%)</a:t>
+              <a:rPr dirty="0"/>
+              <a:t>Conformer </a:t>
+            </a:r>
+            <a:r>
+              <a:rPr dirty="0" err="1"/>
+              <a:t>片段级</a:t>
+            </a:r>
+            <a:r>
+              <a:rPr dirty="0"/>
+              <a:t> Accuracy </a:t>
+            </a:r>
+            <a:r>
+              <a:rPr dirty="0" err="1"/>
+              <a:t>提升</a:t>
+            </a:r>
+            <a:r>
+              <a:rPr dirty="0"/>
+              <a:t>: 0.9415 → 0.9900 (+5.2%)</a:t>
             </a:r>
           </a:p>
           <a:p>
@@ -11925,7 +12191,24 @@
               </a:defRPr>
             </a:pPr>
             <a:r>
-              <a:t>Conformer 片段级 Macro-F1 提升: 0.9180 → 0.9883 (+7.7%)</a:t>
+              <a:rPr dirty="0"/>
+              <a:t>Conformer </a:t>
+            </a:r>
+            <a:r>
+              <a:rPr dirty="0" err="1"/>
+              <a:t>片段级</a:t>
+            </a:r>
+            <a:r>
+              <a:rPr dirty="0"/>
+              <a:t> Macro-F1 </a:t>
+            </a:r>
+            <a:r>
+              <a:rPr dirty="0" err="1"/>
+              <a:t>提升</a:t>
+            </a:r>
+            <a:r>
+              <a:rPr dirty="0"/>
+              <a:t>: 0.9180 → 0.9883 (+7.7%)</a:t>
             </a:r>
           </a:p>
           <a:p>
@@ -11947,7 +12230,28 @@
               </a:defRPr>
             </a:pPr>
             <a:r>
-              <a:t>文件级 Accuracy 和 Macro-F1 均达到 100%</a:t>
+              <a:rPr dirty="0" err="1"/>
+              <a:t>文件级</a:t>
+            </a:r>
+            <a:r>
+              <a:rPr dirty="0"/>
+              <a:t> Accuracy </a:t>
+            </a:r>
+            <a:r>
+              <a:rPr dirty="0" err="1"/>
+              <a:t>和</a:t>
+            </a:r>
+            <a:r>
+              <a:rPr dirty="0"/>
+              <a:t> Macro-F1 </a:t>
+            </a:r>
+            <a:r>
+              <a:rPr dirty="0" err="1"/>
+              <a:t>均达到</a:t>
+            </a:r>
+            <a:r>
+              <a:rPr dirty="0"/>
+              <a:t> 100%</a:t>
             </a:r>
           </a:p>
         </p:txBody>
@@ -12030,8 +12334,22 @@
               </a:defRPr>
             </a:pPr>
             <a:r>
-              <a:t>● 自注意力机制有效捕获长程上下文 → 多个片段互相印证，减少局部噪声干扰</a:t>
-            </a:r>
+              <a:rPr dirty="0"/>
+              <a:t>● </a:t>
+            </a:r>
+            <a:r>
+              <a:rPr dirty="0" err="1"/>
+              <a:t>自注意力机制有效捕获长程上下文</a:t>
+            </a:r>
+            <a:r>
+              <a:rPr dirty="0"/>
+              <a:t> → </a:t>
+            </a:r>
+            <a:r>
+              <a:rPr dirty="0" err="1"/>
+              <a:t>多个片段互相印证，减少局部噪声干扰</a:t>
+            </a:r>
+            <a:endParaRPr dirty="0"/>
           </a:p>
           <a:p>
             <a:pPr algn="l">
@@ -12052,8 +12370,22 @@
               </a:defRPr>
             </a:pPr>
             <a:r>
-              <a:t>● 卷积模块保留局部波形建模 → 短时冲击和局部振荡不被遗漏</a:t>
-            </a:r>
+              <a:rPr dirty="0"/>
+              <a:t>● </a:t>
+            </a:r>
+            <a:r>
+              <a:rPr dirty="0" err="1"/>
+              <a:t>卷积模块保留局部波形建模</a:t>
+            </a:r>
+            <a:r>
+              <a:rPr dirty="0"/>
+              <a:t> → </a:t>
+            </a:r>
+            <a:r>
+              <a:rPr dirty="0" err="1"/>
+              <a:t>短时冲击和局部振荡不被遗漏</a:t>
+            </a:r>
+            <a:endParaRPr dirty="0"/>
           </a:p>
           <a:p>
             <a:pPr algn="l">
@@ -12074,7 +12406,40 @@
               </a:defRPr>
             </a:pPr>
             <a:r>
-              <a:t>● 注意力在 CNN 降采样后计算 → 计算可行（~500 长度而非 128000）</a:t>
+              <a:rPr dirty="0"/>
+              <a:t>● </a:t>
+            </a:r>
+            <a:r>
+              <a:rPr dirty="0" err="1"/>
+              <a:t>注意力在</a:t>
+            </a:r>
+            <a:r>
+              <a:rPr dirty="0"/>
+              <a:t> CNN </a:t>
+            </a:r>
+            <a:r>
+              <a:rPr dirty="0" err="1"/>
+              <a:t>降采样后计算</a:t>
+            </a:r>
+            <a:r>
+              <a:rPr dirty="0"/>
+              <a:t> → </a:t>
+            </a:r>
+            <a:r>
+              <a:rPr dirty="0" err="1"/>
+              <a:t>计算可行</a:t>
+            </a:r>
+            <a:r>
+              <a:rPr dirty="0"/>
+              <a:t>（~500 </a:t>
+            </a:r>
+            <a:r>
+              <a:rPr dirty="0" err="1"/>
+              <a:t>长度而非</a:t>
+            </a:r>
+            <a:r>
+              <a:rPr dirty="0"/>
+              <a:t> 128000）</a:t>
             </a:r>
           </a:p>
           <a:p>
@@ -12096,7 +12461,16 @@
               </a:defRPr>
             </a:pPr>
             <a:r>
-              <a:t>● Conformer 训练对超参数更敏感（学习率 0.0005 vs CNN 0.001）</a:t>
+              <a:rPr dirty="0"/>
+              <a:t>● Conformer </a:t>
+            </a:r>
+            <a:r>
+              <a:rPr dirty="0" err="1"/>
+              <a:t>训练对超参数更敏感（学习率</a:t>
+            </a:r>
+            <a:r>
+              <a:rPr dirty="0"/>
+              <a:t> 0.0005 vs CNN 0.001）</a:t>
             </a:r>
           </a:p>
         </p:txBody>
@@ -12141,6 +12515,7 @@
           <a:lstStyle/>
           <a:p>
             <a:pPr algn="ctr"/>
+            <a:endParaRPr/>
           </a:p>
         </p:txBody>
       </p:sp>
@@ -12193,7 +12568,7 @@
 </file>
 
 <file path=ppt/slides/slide15.xml><?xml version="1.0" encoding="utf-8"?>
-<p:sld xmlns:a="http://schemas.openxmlformats.org/drawingml/2006/main" xmlns:p="http://schemas.openxmlformats.org/presentationml/2006/main" xmlns:r="http://schemas.openxmlformats.org/officeDocument/2006/relationships">
+<p:sld xmlns:a="http://schemas.openxmlformats.org/drawingml/2006/main" xmlns:r="http://schemas.openxmlformats.org/officeDocument/2006/relationships" xmlns:p="http://schemas.openxmlformats.org/presentationml/2006/main">
   <p:cSld>
     <p:bg>
       <p:bgPr>
@@ -12209,7 +12584,14 @@
         <p:cNvGrpSpPr/>
         <p:nvPr/>
       </p:nvGrpSpPr>
-      <p:grpSpPr/>
+      <p:grpSpPr>
+        <a:xfrm>
+          <a:off x="0" y="0"/>
+          <a:ext cx="0" cy="0"/>
+          <a:chOff x="0" y="0"/>
+          <a:chExt cx="0" cy="0"/>
+        </a:xfrm>
+      </p:grpSpPr>
       <p:sp>
         <p:nvSpPr>
           <p:cNvPr id="2" name="Rectangle 1"/>
@@ -12250,6 +12632,7 @@
           <a:lstStyle/>
           <a:p>
             <a:pPr algn="ctr"/>
+            <a:endParaRPr/>
           </a:p>
         </p:txBody>
       </p:sp>
@@ -12373,6 +12756,7 @@
           <a:lstStyle/>
           <a:p>
             <a:pPr algn="ctr"/>
+            <a:endParaRPr/>
           </a:p>
         </p:txBody>
       </p:sp>
@@ -12456,6 +12840,7 @@
           <a:lstStyle/>
           <a:p>
             <a:pPr algn="ctr"/>
+            <a:endParaRPr/>
           </a:p>
         </p:txBody>
       </p:sp>
@@ -12539,6 +12924,7 @@
           <a:lstStyle/>
           <a:p>
             <a:pPr algn="ctr"/>
+            <a:endParaRPr/>
           </a:p>
         </p:txBody>
       </p:sp>
@@ -12622,6 +13008,7 @@
           <a:lstStyle/>
           <a:p>
             <a:pPr algn="ctr"/>
+            <a:endParaRPr/>
           </a:p>
         </p:txBody>
       </p:sp>
@@ -12705,6 +13092,7 @@
           <a:lstStyle/>
           <a:p>
             <a:pPr algn="ctr"/>
+            <a:endParaRPr/>
           </a:p>
         </p:txBody>
       </p:sp>
@@ -12788,6 +13176,7 @@
           <a:lstStyle/>
           <a:p>
             <a:pPr algn="ctr"/>
+            <a:endParaRPr/>
           </a:p>
         </p:txBody>
       </p:sp>
@@ -12871,6 +13260,7 @@
           <a:lstStyle/>
           <a:p>
             <a:pPr algn="ctr"/>
+            <a:endParaRPr/>
           </a:p>
         </p:txBody>
       </p:sp>
@@ -12954,6 +13344,7 @@
           <a:lstStyle/>
           <a:p>
             <a:pPr algn="ctr"/>
+            <a:endParaRPr/>
           </a:p>
         </p:txBody>
       </p:sp>
@@ -13037,6 +13428,7 @@
           <a:lstStyle/>
           <a:p>
             <a:pPr algn="ctr"/>
+            <a:endParaRPr/>
           </a:p>
         </p:txBody>
       </p:sp>
@@ -13120,6 +13512,7 @@
           <a:lstStyle/>
           <a:p>
             <a:pPr algn="ctr"/>
+            <a:endParaRPr/>
           </a:p>
         </p:txBody>
       </p:sp>
@@ -13171,7 +13564,7 @@
         </p:nvSpPr>
         <p:spPr>
           <a:xfrm>
-            <a:off x="640080" y="2834640"/>
+            <a:off x="640080" y="3872537"/>
             <a:ext cx="5029200" cy="365760"/>
           </a:xfrm>
           <a:prstGeom prst="rect">
@@ -13198,8 +13591,10 @@
               </a:defRPr>
             </a:pPr>
             <a:r>
+              <a:rPr dirty="0" err="1"/>
               <a:t>物理误差分析</a:t>
             </a:r>
+            <a:endParaRPr dirty="0"/>
           </a:p>
         </p:txBody>
       </p:sp>
@@ -13211,7 +13606,7 @@
         </p:nvSpPr>
         <p:spPr>
           <a:xfrm>
-            <a:off x="640080" y="3108960"/>
+            <a:off x="640080" y="4297680"/>
             <a:ext cx="5029200" cy="1828800"/>
           </a:xfrm>
           <a:prstGeom prst="rect">
@@ -13241,7 +13636,20 @@
               </a:defRPr>
             </a:pPr>
             <a:r>
-              <a:t>中位绝对误差: 1.45 m  |  P95 误差: 4.99 m</a:t>
+              <a:rPr dirty="0" err="1"/>
+              <a:t>中位绝对误差</a:t>
+            </a:r>
+            <a:r>
+              <a:rPr dirty="0"/>
+              <a:t>: 1.45 m  |  P95 </a:t>
+            </a:r>
+            <a:r>
+              <a:rPr dirty="0" err="1"/>
+              <a:t>误差</a:t>
+            </a:r>
+            <a:r>
+              <a:rPr dirty="0"/>
+              <a:t>: 4.99 m</a:t>
             </a:r>
           </a:p>
           <a:p>
@@ -13263,7 +13671,12 @@
               </a:defRPr>
             </a:pPr>
             <a:r>
-              <a:t>最大绝对误差: 6.86 m  |  R² = 0.54</a:t>
+              <a:rPr dirty="0" err="1"/>
+              <a:t>最大绝对误差</a:t>
+            </a:r>
+            <a:r>
+              <a:rPr dirty="0"/>
+              <a:t>: 6.86 m  |  R² = 0.54</a:t>
             </a:r>
           </a:p>
           <a:p>
@@ -13285,7 +13698,24 @@
               </a:defRPr>
             </a:pPr>
             <a:r>
-              <a:t>Bias (有符号偏差): +0.45 m (整体偏正)</a:t>
+              <a:rPr dirty="0"/>
+              <a:t>Bias (</a:t>
+            </a:r>
+            <a:r>
+              <a:rPr dirty="0" err="1"/>
+              <a:t>有符号偏差</a:t>
+            </a:r>
+            <a:r>
+              <a:rPr dirty="0"/>
+              <a:t>): +0.45 m (</a:t>
+            </a:r>
+            <a:r>
+              <a:rPr dirty="0" err="1"/>
+              <a:t>整体偏正</a:t>
+            </a:r>
+            <a:r>
+              <a:rPr dirty="0"/>
+              <a:t>)</a:t>
             </a:r>
           </a:p>
           <a:p>
@@ -13307,7 +13737,20 @@
               </a:defRPr>
             </a:pPr>
             <a:r>
-              <a:t>误差 ≤ 1.0 m: 35%  | 误差 ≤ 2.0 m: 66%</a:t>
+              <a:rPr dirty="0" err="1"/>
+              <a:t>误差</a:t>
+            </a:r>
+            <a:r>
+              <a:rPr dirty="0"/>
+              <a:t> ≤ 1.0 m: 35%  | </a:t>
+            </a:r>
+            <a:r>
+              <a:rPr dirty="0" err="1"/>
+              <a:t>误差</a:t>
+            </a:r>
+            <a:r>
+              <a:rPr dirty="0"/>
+              <a:t> ≤ 2.0 m: 66%</a:t>
             </a:r>
           </a:p>
         </p:txBody>
@@ -13392,6 +13835,7 @@
           <a:lstStyle/>
           <a:p>
             <a:pPr algn="ctr"/>
+            <a:endParaRPr/>
           </a:p>
         </p:txBody>
       </p:sp>
@@ -13475,6 +13919,7 @@
           <a:lstStyle/>
           <a:p>
             <a:pPr algn="ctr"/>
+            <a:endParaRPr/>
           </a:p>
         </p:txBody>
       </p:sp>
@@ -13558,6 +14003,7 @@
           <a:lstStyle/>
           <a:p>
             <a:pPr algn="ctr"/>
+            <a:endParaRPr/>
           </a:p>
         </p:txBody>
       </p:sp>
@@ -13641,6 +14087,7 @@
           <a:lstStyle/>
           <a:p>
             <a:pPr algn="ctr"/>
+            <a:endParaRPr/>
           </a:p>
         </p:txBody>
       </p:sp>
@@ -13724,6 +14171,7 @@
           <a:lstStyle/>
           <a:p>
             <a:pPr algn="ctr"/>
+            <a:endParaRPr/>
           </a:p>
         </p:txBody>
       </p:sp>
@@ -13807,6 +14255,7 @@
           <a:lstStyle/>
           <a:p>
             <a:pPr algn="ctr"/>
+            <a:endParaRPr/>
           </a:p>
         </p:txBody>
       </p:sp>
@@ -13890,6 +14339,7 @@
           <a:lstStyle/>
           <a:p>
             <a:pPr algn="ctr"/>
+            <a:endParaRPr/>
           </a:p>
         </p:txBody>
       </p:sp>
@@ -13973,6 +14423,7 @@
           <a:lstStyle/>
           <a:p>
             <a:pPr algn="ctr"/>
+            <a:endParaRPr/>
           </a:p>
         </p:txBody>
       </p:sp>
@@ -14056,6 +14507,7 @@
           <a:lstStyle/>
           <a:p>
             <a:pPr algn="ctr"/>
+            <a:endParaRPr/>
           </a:p>
         </p:txBody>
       </p:sp>
@@ -14139,6 +14591,7 @@
           <a:lstStyle/>
           <a:p>
             <a:pPr algn="ctr"/>
+            <a:endParaRPr/>
           </a:p>
         </p:txBody>
       </p:sp>
@@ -14222,6 +14675,7 @@
           <a:lstStyle/>
           <a:p>
             <a:pPr algn="ctr"/>
+            <a:endParaRPr/>
           </a:p>
         </p:txBody>
       </p:sp>
@@ -14305,6 +14759,7 @@
           <a:lstStyle/>
           <a:p>
             <a:pPr algn="ctr"/>
+            <a:endParaRPr/>
           </a:p>
         </p:txBody>
       </p:sp>
@@ -14388,6 +14843,7 @@
           <a:lstStyle/>
           <a:p>
             <a:pPr algn="ctr"/>
+            <a:endParaRPr/>
           </a:p>
         </p:txBody>
       </p:sp>
@@ -14471,6 +14927,7 @@
           <a:lstStyle/>
           <a:p>
             <a:pPr algn="ctr"/>
+            <a:endParaRPr/>
           </a:p>
         </p:txBody>
       </p:sp>
@@ -14554,6 +15011,7 @@
           <a:lstStyle/>
           <a:p>
             <a:pPr algn="ctr"/>
+            <a:endParaRPr/>
           </a:p>
         </p:txBody>
       </p:sp>
@@ -14637,6 +15095,7 @@
           <a:lstStyle/>
           <a:p>
             <a:pPr algn="ctr"/>
+            <a:endParaRPr/>
           </a:p>
         </p:txBody>
       </p:sp>
@@ -14720,6 +15179,7 @@
           <a:lstStyle/>
           <a:p>
             <a:pPr algn="ctr"/>
+            <a:endParaRPr/>
           </a:p>
         </p:txBody>
       </p:sp>
@@ -14803,6 +15263,7 @@
           <a:lstStyle/>
           <a:p>
             <a:pPr algn="ctr"/>
+            <a:endParaRPr/>
           </a:p>
         </p:txBody>
       </p:sp>
@@ -14886,6 +15347,7 @@
           <a:lstStyle/>
           <a:p>
             <a:pPr algn="ctr"/>
+            <a:endParaRPr/>
           </a:p>
         </p:txBody>
       </p:sp>
@@ -14969,6 +15431,7 @@
           <a:lstStyle/>
           <a:p>
             <a:pPr algn="ctr"/>
+            <a:endParaRPr/>
           </a:p>
         </p:txBody>
       </p:sp>
@@ -15052,6 +15515,7 @@
           <a:lstStyle/>
           <a:p>
             <a:pPr algn="ctr"/>
+            <a:endParaRPr/>
           </a:p>
         </p:txBody>
       </p:sp>
@@ -15135,6 +15599,7 @@
           <a:lstStyle/>
           <a:p>
             <a:pPr algn="ctr"/>
+            <a:endParaRPr/>
           </a:p>
         </p:txBody>
       </p:sp>
@@ -15218,6 +15683,7 @@
           <a:lstStyle/>
           <a:p>
             <a:pPr algn="ctr"/>
+            <a:endParaRPr/>
           </a:p>
         </p:txBody>
       </p:sp>
@@ -15301,6 +15767,7 @@
           <a:lstStyle/>
           <a:p>
             <a:pPr algn="ctr"/>
+            <a:endParaRPr/>
           </a:p>
         </p:txBody>
       </p:sp>
@@ -15384,6 +15851,7 @@
           <a:lstStyle/>
           <a:p>
             <a:pPr algn="ctr"/>
+            <a:endParaRPr/>
           </a:p>
         </p:txBody>
       </p:sp>
@@ -15467,6 +15935,7 @@
           <a:lstStyle/>
           <a:p>
             <a:pPr algn="ctr"/>
+            <a:endParaRPr/>
           </a:p>
         </p:txBody>
       </p:sp>
@@ -15550,6 +16019,7 @@
           <a:lstStyle/>
           <a:p>
             <a:pPr algn="ctr"/>
+            <a:endParaRPr/>
           </a:p>
         </p:txBody>
       </p:sp>
@@ -15633,6 +16103,7 @@
           <a:lstStyle/>
           <a:p>
             <a:pPr algn="ctr"/>
+            <a:endParaRPr/>
           </a:p>
         </p:txBody>
       </p:sp>
@@ -15716,6 +16187,7 @@
           <a:lstStyle/>
           <a:p>
             <a:pPr algn="ctr"/>
+            <a:endParaRPr/>
           </a:p>
         </p:txBody>
       </p:sp>
@@ -15799,6 +16271,7 @@
           <a:lstStyle/>
           <a:p>
             <a:pPr algn="ctr"/>
+            <a:endParaRPr/>
           </a:p>
         </p:txBody>
       </p:sp>
@@ -15882,6 +16355,7 @@
           <a:lstStyle/>
           <a:p>
             <a:pPr algn="ctr"/>
+            <a:endParaRPr/>
           </a:p>
         </p:txBody>
       </p:sp>
@@ -15965,6 +16439,7 @@
           <a:lstStyle/>
           <a:p>
             <a:pPr algn="ctr"/>
+            <a:endParaRPr/>
           </a:p>
         </p:txBody>
       </p:sp>
@@ -16048,6 +16523,7 @@
           <a:lstStyle/>
           <a:p>
             <a:pPr algn="ctr"/>
+            <a:endParaRPr/>
           </a:p>
         </p:txBody>
       </p:sp>
@@ -16131,6 +16607,7 @@
           <a:lstStyle/>
           <a:p>
             <a:pPr algn="ctr"/>
+            <a:endParaRPr/>
           </a:p>
         </p:txBody>
       </p:sp>
@@ -16214,6 +16691,7 @@
           <a:lstStyle/>
           <a:p>
             <a:pPr algn="ctr"/>
+            <a:endParaRPr/>
           </a:p>
         </p:txBody>
       </p:sp>
@@ -16297,6 +16775,7 @@
           <a:lstStyle/>
           <a:p>
             <a:pPr algn="ctr"/>
+            <a:endParaRPr/>
           </a:p>
         </p:txBody>
       </p:sp>
@@ -16551,6 +17030,7 @@
           <a:lstStyle/>
           <a:p>
             <a:pPr algn="ctr"/>
+            <a:endParaRPr/>
           </a:p>
         </p:txBody>
       </p:sp>
@@ -16603,7 +17083,7 @@
 </file>
 
 <file path=ppt/slides/slide16.xml><?xml version="1.0" encoding="utf-8"?>
-<p:sld xmlns:a="http://schemas.openxmlformats.org/drawingml/2006/main" xmlns:p="http://schemas.openxmlformats.org/presentationml/2006/main" xmlns:r="http://schemas.openxmlformats.org/officeDocument/2006/relationships">
+<p:sld xmlns:a="http://schemas.openxmlformats.org/drawingml/2006/main" xmlns:r="http://schemas.openxmlformats.org/officeDocument/2006/relationships" xmlns:p="http://schemas.openxmlformats.org/presentationml/2006/main">
   <p:cSld>
     <p:bg>
       <p:bgPr>
@@ -16619,7 +17099,14 @@
         <p:cNvGrpSpPr/>
         <p:nvPr/>
       </p:nvGrpSpPr>
-      <p:grpSpPr/>
+      <p:grpSpPr>
+        <a:xfrm>
+          <a:off x="0" y="0"/>
+          <a:ext cx="0" cy="0"/>
+          <a:chOff x="0" y="0"/>
+          <a:chExt cx="0" cy="0"/>
+        </a:xfrm>
+      </p:grpSpPr>
       <p:sp>
         <p:nvSpPr>
           <p:cNvPr id="2" name="Rectangle 1"/>
@@ -16660,6 +17147,7 @@
           <a:lstStyle/>
           <a:p>
             <a:pPr algn="ctr"/>
+            <a:endParaRPr/>
           </a:p>
         </p:txBody>
       </p:sp>
@@ -16783,6 +17271,7 @@
           <a:lstStyle/>
           <a:p>
             <a:pPr algn="ctr"/>
+            <a:endParaRPr/>
           </a:p>
         </p:txBody>
       </p:sp>
@@ -16866,6 +17355,7 @@
           <a:lstStyle/>
           <a:p>
             <a:pPr algn="ctr"/>
+            <a:endParaRPr/>
           </a:p>
         </p:txBody>
       </p:sp>
@@ -16949,6 +17439,7 @@
           <a:lstStyle/>
           <a:p>
             <a:pPr algn="ctr"/>
+            <a:endParaRPr/>
           </a:p>
         </p:txBody>
       </p:sp>
@@ -17032,6 +17523,7 @@
           <a:lstStyle/>
           <a:p>
             <a:pPr algn="ctr"/>
+            <a:endParaRPr/>
           </a:p>
         </p:txBody>
       </p:sp>
@@ -17115,6 +17607,7 @@
           <a:lstStyle/>
           <a:p>
             <a:pPr algn="ctr"/>
+            <a:endParaRPr/>
           </a:p>
         </p:txBody>
       </p:sp>
@@ -17198,6 +17691,7 @@
           <a:lstStyle/>
           <a:p>
             <a:pPr algn="ctr"/>
+            <a:endParaRPr/>
           </a:p>
         </p:txBody>
       </p:sp>
@@ -17281,6 +17775,7 @@
           <a:lstStyle/>
           <a:p>
             <a:pPr algn="ctr"/>
+            <a:endParaRPr/>
           </a:p>
         </p:txBody>
       </p:sp>
@@ -17364,6 +17859,7 @@
           <a:lstStyle/>
           <a:p>
             <a:pPr algn="ctr"/>
+            <a:endParaRPr/>
           </a:p>
         </p:txBody>
       </p:sp>
@@ -17447,6 +17943,7 @@
           <a:lstStyle/>
           <a:p>
             <a:pPr algn="ctr"/>
+            <a:endParaRPr/>
           </a:p>
         </p:txBody>
       </p:sp>
@@ -17530,6 +18027,7 @@
           <a:lstStyle/>
           <a:p>
             <a:pPr algn="ctr"/>
+            <a:endParaRPr/>
           </a:p>
         </p:txBody>
       </p:sp>
@@ -17613,6 +18111,7 @@
           <a:lstStyle/>
           <a:p>
             <a:pPr algn="ctr"/>
+            <a:endParaRPr/>
           </a:p>
         </p:txBody>
       </p:sp>
@@ -17696,6 +18195,7 @@
           <a:lstStyle/>
           <a:p>
             <a:pPr algn="ctr"/>
+            <a:endParaRPr/>
           </a:p>
         </p:txBody>
       </p:sp>
@@ -17779,6 +18279,7 @@
           <a:lstStyle/>
           <a:p>
             <a:pPr algn="ctr"/>
+            <a:endParaRPr/>
           </a:p>
         </p:txBody>
       </p:sp>
@@ -17862,6 +18363,7 @@
           <a:lstStyle/>
           <a:p>
             <a:pPr algn="ctr"/>
+            <a:endParaRPr/>
           </a:p>
         </p:txBody>
       </p:sp>
@@ -17945,6 +18447,7 @@
           <a:lstStyle/>
           <a:p>
             <a:pPr algn="ctr"/>
+            <a:endParaRPr/>
           </a:p>
         </p:txBody>
       </p:sp>
@@ -18028,6 +18531,7 @@
           <a:lstStyle/>
           <a:p>
             <a:pPr algn="ctr"/>
+            <a:endParaRPr/>
           </a:p>
         </p:txBody>
       </p:sp>
@@ -18111,6 +18615,7 @@
           <a:lstStyle/>
           <a:p>
             <a:pPr algn="ctr"/>
+            <a:endParaRPr/>
           </a:p>
         </p:txBody>
       </p:sp>
@@ -18194,6 +18699,7 @@
           <a:lstStyle/>
           <a:p>
             <a:pPr algn="ctr"/>
+            <a:endParaRPr/>
           </a:p>
         </p:txBody>
       </p:sp>
@@ -18277,6 +18783,7 @@
           <a:lstStyle/>
           <a:p>
             <a:pPr algn="ctr"/>
+            <a:endParaRPr/>
           </a:p>
         </p:txBody>
       </p:sp>
@@ -18360,6 +18867,7 @@
           <a:lstStyle/>
           <a:p>
             <a:pPr algn="ctr"/>
+            <a:endParaRPr/>
           </a:p>
         </p:txBody>
       </p:sp>
@@ -18443,6 +18951,7 @@
           <a:lstStyle/>
           <a:p>
             <a:pPr algn="ctr"/>
+            <a:endParaRPr/>
           </a:p>
         </p:txBody>
       </p:sp>
@@ -18566,6 +19075,7 @@
           <a:lstStyle/>
           <a:p>
             <a:pPr algn="ctr"/>
+            <a:endParaRPr/>
           </a:p>
         </p:txBody>
       </p:sp>
@@ -18649,6 +19159,7 @@
           <a:lstStyle/>
           <a:p>
             <a:pPr algn="ctr"/>
+            <a:endParaRPr/>
           </a:p>
         </p:txBody>
       </p:sp>
@@ -18732,6 +19243,7 @@
           <a:lstStyle/>
           <a:p>
             <a:pPr algn="ctr"/>
+            <a:endParaRPr/>
           </a:p>
         </p:txBody>
       </p:sp>
@@ -18815,6 +19327,7 @@
           <a:lstStyle/>
           <a:p>
             <a:pPr algn="ctr"/>
+            <a:endParaRPr/>
           </a:p>
         </p:txBody>
       </p:sp>
@@ -18898,6 +19411,7 @@
           <a:lstStyle/>
           <a:p>
             <a:pPr algn="ctr"/>
+            <a:endParaRPr/>
           </a:p>
         </p:txBody>
       </p:sp>
@@ -18981,6 +19495,7 @@
           <a:lstStyle/>
           <a:p>
             <a:pPr algn="ctr"/>
+            <a:endParaRPr/>
           </a:p>
         </p:txBody>
       </p:sp>
@@ -19064,6 +19579,7 @@
           <a:lstStyle/>
           <a:p>
             <a:pPr algn="ctr"/>
+            <a:endParaRPr/>
           </a:p>
         </p:txBody>
       </p:sp>
@@ -19147,6 +19663,7 @@
           <a:lstStyle/>
           <a:p>
             <a:pPr algn="ctr"/>
+            <a:endParaRPr/>
           </a:p>
         </p:txBody>
       </p:sp>
@@ -19230,6 +19747,7 @@
           <a:lstStyle/>
           <a:p>
             <a:pPr algn="ctr"/>
+            <a:endParaRPr/>
           </a:p>
         </p:txBody>
       </p:sp>
@@ -19313,6 +19831,7 @@
           <a:lstStyle/>
           <a:p>
             <a:pPr algn="ctr"/>
+            <a:endParaRPr/>
           </a:p>
         </p:txBody>
       </p:sp>
@@ -19396,6 +19915,7 @@
           <a:lstStyle/>
           <a:p>
             <a:pPr algn="ctr"/>
+            <a:endParaRPr/>
           </a:p>
         </p:txBody>
       </p:sp>
@@ -19479,6 +19999,7 @@
           <a:lstStyle/>
           <a:p>
             <a:pPr algn="ctr"/>
+            <a:endParaRPr/>
           </a:p>
         </p:txBody>
       </p:sp>
@@ -19602,6 +20123,7 @@
           <a:lstStyle/>
           <a:p>
             <a:pPr algn="ctr"/>
+            <a:endParaRPr/>
           </a:p>
         </p:txBody>
       </p:sp>
@@ -19685,6 +20207,7 @@
           <a:lstStyle/>
           <a:p>
             <a:pPr algn="ctr"/>
+            <a:endParaRPr/>
           </a:p>
         </p:txBody>
       </p:sp>
@@ -19768,6 +20291,7 @@
           <a:lstStyle/>
           <a:p>
             <a:pPr algn="ctr"/>
+            <a:endParaRPr/>
           </a:p>
         </p:txBody>
       </p:sp>
@@ -19851,6 +20375,7 @@
           <a:lstStyle/>
           <a:p>
             <a:pPr algn="ctr"/>
+            <a:endParaRPr/>
           </a:p>
         </p:txBody>
       </p:sp>
@@ -19934,6 +20459,7 @@
           <a:lstStyle/>
           <a:p>
             <a:pPr algn="ctr"/>
+            <a:endParaRPr/>
           </a:p>
         </p:txBody>
       </p:sp>
@@ -20017,6 +20543,7 @@
           <a:lstStyle/>
           <a:p>
             <a:pPr algn="ctr"/>
+            <a:endParaRPr/>
           </a:p>
         </p:txBody>
       </p:sp>
@@ -20100,6 +20627,7 @@
           <a:lstStyle/>
           <a:p>
             <a:pPr algn="ctr"/>
+            <a:endParaRPr/>
           </a:p>
         </p:txBody>
       </p:sp>
@@ -20183,6 +20711,7 @@
           <a:lstStyle/>
           <a:p>
             <a:pPr algn="ctr"/>
+            <a:endParaRPr/>
           </a:p>
         </p:txBody>
       </p:sp>
@@ -20266,6 +20795,7 @@
           <a:lstStyle/>
           <a:p>
             <a:pPr algn="ctr"/>
+            <a:endParaRPr/>
           </a:p>
         </p:txBody>
       </p:sp>
@@ -20349,6 +20879,7 @@
           <a:lstStyle/>
           <a:p>
             <a:pPr algn="ctr"/>
+            <a:endParaRPr/>
           </a:p>
         </p:txBody>
       </p:sp>
@@ -20432,6 +20963,7 @@
           <a:lstStyle/>
           <a:p>
             <a:pPr algn="ctr"/>
+            <a:endParaRPr/>
           </a:p>
         </p:txBody>
       </p:sp>
@@ -20515,6 +21047,7 @@
           <a:lstStyle/>
           <a:p>
             <a:pPr algn="ctr"/>
+            <a:endParaRPr/>
           </a:p>
         </p:txBody>
       </p:sp>
@@ -20598,6 +21131,7 @@
           <a:lstStyle/>
           <a:p>
             <a:pPr algn="ctr"/>
+            <a:endParaRPr/>
           </a:p>
         </p:txBody>
       </p:sp>
@@ -20681,6 +21215,7 @@
           <a:lstStyle/>
           <a:p>
             <a:pPr algn="ctr"/>
+            <a:endParaRPr/>
           </a:p>
         </p:txBody>
       </p:sp>
@@ -20764,6 +21299,7 @@
           <a:lstStyle/>
           <a:p>
             <a:pPr algn="ctr"/>
+            <a:endParaRPr/>
           </a:p>
         </p:txBody>
       </p:sp>
@@ -20815,7 +21351,7 @@
         </p:nvSpPr>
         <p:spPr>
           <a:xfrm>
-            <a:off x="6400800" y="2834640"/>
+            <a:off x="6355080" y="3191256"/>
             <a:ext cx="5212080" cy="365760"/>
           </a:xfrm>
           <a:prstGeom prst="rect">
@@ -20842,7 +21378,16 @@
               </a:defRPr>
             </a:pPr>
             <a:r>
-              <a:t>→ Conformer 回归未超 CNN！</a:t>
+              <a:rPr dirty="0"/>
+              <a:t>→ Conformer </a:t>
+            </a:r>
+            <a:r>
+              <a:rPr dirty="0" err="1"/>
+              <a:t>回归未超</a:t>
+            </a:r>
+            <a:r>
+              <a:rPr dirty="0"/>
+              <a:t> CNN！</a:t>
             </a:r>
           </a:p>
         </p:txBody>
@@ -21124,6 +21669,7 @@
           <a:lstStyle/>
           <a:p>
             <a:pPr algn="ctr"/>
+            <a:endParaRPr/>
           </a:p>
         </p:txBody>
       </p:sp>
@@ -21176,7 +21722,7 @@
 </file>
 
 <file path=ppt/slides/slide17.xml><?xml version="1.0" encoding="utf-8"?>
-<p:sld xmlns:a="http://schemas.openxmlformats.org/drawingml/2006/main" xmlns:p="http://schemas.openxmlformats.org/presentationml/2006/main" xmlns:r="http://schemas.openxmlformats.org/officeDocument/2006/relationships">
+<p:sld xmlns:a="http://schemas.openxmlformats.org/drawingml/2006/main" xmlns:r="http://schemas.openxmlformats.org/officeDocument/2006/relationships" xmlns:p="http://schemas.openxmlformats.org/presentationml/2006/main">
   <p:cSld>
     <p:bg>
       <p:bgPr>
@@ -21192,7 +21738,14 @@
         <p:cNvGrpSpPr/>
         <p:nvPr/>
       </p:nvGrpSpPr>
-      <p:grpSpPr/>
+      <p:grpSpPr>
+        <a:xfrm>
+          <a:off x="0" y="0"/>
+          <a:ext cx="0" cy="0"/>
+          <a:chOff x="0" y="0"/>
+          <a:chExt cx="0" cy="0"/>
+        </a:xfrm>
+      </p:grpSpPr>
       <p:sp>
         <p:nvSpPr>
           <p:cNvPr id="2" name="Rectangle 1"/>
@@ -21233,6 +21786,7 @@
           <a:lstStyle/>
           <a:p>
             <a:pPr algn="ctr"/>
+            <a:endParaRPr/>
           </a:p>
         </p:txBody>
       </p:sp>
@@ -21356,6 +21910,7 @@
           <a:lstStyle/>
           <a:p>
             <a:pPr algn="ctr"/>
+            <a:endParaRPr/>
           </a:p>
         </p:txBody>
       </p:sp>
@@ -21399,6 +21954,7 @@
           <a:lstStyle/>
           <a:p>
             <a:pPr algn="ctr"/>
+            <a:endParaRPr/>
           </a:p>
         </p:txBody>
       </p:sp>
@@ -21482,6 +22038,7 @@
           <a:lstStyle/>
           <a:p>
             <a:pPr algn="ctr"/>
+            <a:endParaRPr/>
           </a:p>
         </p:txBody>
       </p:sp>
@@ -21565,6 +22122,7 @@
           <a:lstStyle/>
           <a:p>
             <a:pPr algn="ctr"/>
+            <a:endParaRPr/>
           </a:p>
         </p:txBody>
       </p:sp>
@@ -21648,6 +22206,7 @@
           <a:lstStyle/>
           <a:p>
             <a:pPr algn="ctr"/>
+            <a:endParaRPr/>
           </a:p>
         </p:txBody>
       </p:sp>
@@ -21731,6 +22290,7 @@
           <a:lstStyle/>
           <a:p>
             <a:pPr algn="ctr"/>
+            <a:endParaRPr/>
           </a:p>
         </p:txBody>
       </p:sp>
@@ -21814,6 +22374,7 @@
           <a:lstStyle/>
           <a:p>
             <a:pPr algn="ctr"/>
+            <a:endParaRPr/>
           </a:p>
         </p:txBody>
       </p:sp>
@@ -21901,6 +22462,7 @@
           <a:lstStyle/>
           <a:p>
             <a:pPr algn="ctr"/>
+            <a:endParaRPr/>
           </a:p>
         </p:txBody>
       </p:sp>
@@ -21984,6 +22546,7 @@
           <a:lstStyle/>
           <a:p>
             <a:pPr algn="ctr"/>
+            <a:endParaRPr/>
           </a:p>
         </p:txBody>
       </p:sp>
@@ -22071,6 +22634,7 @@
           <a:lstStyle/>
           <a:p>
             <a:pPr algn="ctr"/>
+            <a:endParaRPr/>
           </a:p>
         </p:txBody>
       </p:sp>
@@ -22158,6 +22722,7 @@
           <a:lstStyle/>
           <a:p>
             <a:pPr algn="ctr"/>
+            <a:endParaRPr/>
           </a:p>
         </p:txBody>
       </p:sp>
@@ -22241,6 +22806,7 @@
           <a:lstStyle/>
           <a:p>
             <a:pPr algn="ctr"/>
+            <a:endParaRPr/>
           </a:p>
         </p:txBody>
       </p:sp>
@@ -22328,6 +22894,7 @@
           <a:lstStyle/>
           <a:p>
             <a:pPr algn="ctr"/>
+            <a:endParaRPr/>
           </a:p>
         </p:txBody>
       </p:sp>
@@ -22411,6 +22978,7 @@
           <a:lstStyle/>
           <a:p>
             <a:pPr algn="ctr"/>
+            <a:endParaRPr/>
           </a:p>
         </p:txBody>
       </p:sp>
@@ -22498,6 +23066,7 @@
           <a:lstStyle/>
           <a:p>
             <a:pPr algn="ctr"/>
+            <a:endParaRPr/>
           </a:p>
         </p:txBody>
       </p:sp>
@@ -22585,6 +23154,7 @@
           <a:lstStyle/>
           <a:p>
             <a:pPr algn="ctr"/>
+            <a:endParaRPr/>
           </a:p>
         </p:txBody>
       </p:sp>
@@ -22668,6 +23238,7 @@
           <a:lstStyle/>
           <a:p>
             <a:pPr algn="ctr"/>
+            <a:endParaRPr/>
           </a:p>
         </p:txBody>
       </p:sp>
@@ -22755,6 +23326,7 @@
           <a:lstStyle/>
           <a:p>
             <a:pPr algn="ctr"/>
+            <a:endParaRPr/>
           </a:p>
         </p:txBody>
       </p:sp>
@@ -22838,6 +23410,7 @@
           <a:lstStyle/>
           <a:p>
             <a:pPr algn="ctr"/>
+            <a:endParaRPr/>
           </a:p>
         </p:txBody>
       </p:sp>
@@ -22925,6 +23498,7 @@
           <a:lstStyle/>
           <a:p>
             <a:pPr algn="ctr"/>
+            <a:endParaRPr/>
           </a:p>
         </p:txBody>
       </p:sp>
@@ -23012,6 +23586,7 @@
           <a:lstStyle/>
           <a:p>
             <a:pPr algn="ctr"/>
+            <a:endParaRPr/>
           </a:p>
         </p:txBody>
       </p:sp>
@@ -23095,6 +23670,7 @@
           <a:lstStyle/>
           <a:p>
             <a:pPr algn="ctr"/>
+            <a:endParaRPr/>
           </a:p>
         </p:txBody>
       </p:sp>
@@ -23182,6 +23758,7 @@
           <a:lstStyle/>
           <a:p>
             <a:pPr algn="ctr"/>
+            <a:endParaRPr/>
           </a:p>
         </p:txBody>
       </p:sp>
@@ -23265,6 +23842,7 @@
           <a:lstStyle/>
           <a:p>
             <a:pPr algn="ctr"/>
+            <a:endParaRPr/>
           </a:p>
         </p:txBody>
       </p:sp>
@@ -23352,6 +23930,7 @@
           <a:lstStyle/>
           <a:p>
             <a:pPr algn="ctr"/>
+            <a:endParaRPr/>
           </a:p>
         </p:txBody>
       </p:sp>
@@ -23439,6 +24018,7 @@
           <a:lstStyle/>
           <a:p>
             <a:pPr algn="ctr"/>
+            <a:endParaRPr/>
           </a:p>
         </p:txBody>
       </p:sp>
@@ -23522,6 +24102,7 @@
           <a:lstStyle/>
           <a:p>
             <a:pPr algn="ctr"/>
+            <a:endParaRPr/>
           </a:p>
         </p:txBody>
       </p:sp>
@@ -23609,6 +24190,7 @@
           <a:lstStyle/>
           <a:p>
             <a:pPr algn="ctr"/>
+            <a:endParaRPr/>
           </a:p>
         </p:txBody>
       </p:sp>
@@ -23692,6 +24274,7 @@
           <a:lstStyle/>
           <a:p>
             <a:pPr algn="ctr"/>
+            <a:endParaRPr/>
           </a:p>
         </p:txBody>
       </p:sp>
@@ -23779,6 +24362,7 @@
           <a:lstStyle/>
           <a:p>
             <a:pPr algn="ctr"/>
+            <a:endParaRPr/>
           </a:p>
         </p:txBody>
       </p:sp>
@@ -23866,6 +24450,7 @@
           <a:lstStyle/>
           <a:p>
             <a:pPr algn="ctr"/>
+            <a:endParaRPr/>
           </a:p>
         </p:txBody>
       </p:sp>
@@ -23949,6 +24534,7 @@
           <a:lstStyle/>
           <a:p>
             <a:pPr algn="ctr"/>
+            <a:endParaRPr/>
           </a:p>
         </p:txBody>
       </p:sp>
@@ -24036,6 +24622,7 @@
           <a:lstStyle/>
           <a:p>
             <a:pPr algn="ctr"/>
+            <a:endParaRPr/>
           </a:p>
         </p:txBody>
       </p:sp>
@@ -24119,6 +24706,7 @@
           <a:lstStyle/>
           <a:p>
             <a:pPr algn="ctr"/>
+            <a:endParaRPr/>
           </a:p>
         </p:txBody>
       </p:sp>
@@ -24206,6 +24794,7 @@
           <a:lstStyle/>
           <a:p>
             <a:pPr algn="ctr"/>
+            <a:endParaRPr/>
           </a:p>
         </p:txBody>
       </p:sp>
@@ -24293,6 +24882,7 @@
           <a:lstStyle/>
           <a:p>
             <a:pPr algn="ctr"/>
+            <a:endParaRPr/>
           </a:p>
         </p:txBody>
       </p:sp>
@@ -24376,6 +24966,7 @@
           <a:lstStyle/>
           <a:p>
             <a:pPr algn="ctr"/>
+            <a:endParaRPr/>
           </a:p>
         </p:txBody>
       </p:sp>
@@ -24484,6 +25075,7 @@
           <a:lstStyle/>
           <a:p>
             <a:pPr algn="ctr"/>
+            <a:endParaRPr/>
           </a:p>
         </p:txBody>
       </p:sp>
@@ -24536,7 +25128,7 @@
 </file>
 
 <file path=ppt/slides/slide18.xml><?xml version="1.0" encoding="utf-8"?>
-<p:sld xmlns:a="http://schemas.openxmlformats.org/drawingml/2006/main" xmlns:p="http://schemas.openxmlformats.org/presentationml/2006/main" xmlns:r="http://schemas.openxmlformats.org/officeDocument/2006/relationships">
+<p:sld xmlns:a="http://schemas.openxmlformats.org/drawingml/2006/main" xmlns:r="http://schemas.openxmlformats.org/officeDocument/2006/relationships" xmlns:p="http://schemas.openxmlformats.org/presentationml/2006/main">
   <p:cSld>
     <p:bg>
       <p:bgPr>
@@ -24552,7 +25144,14 @@
         <p:cNvGrpSpPr/>
         <p:nvPr/>
       </p:nvGrpSpPr>
-      <p:grpSpPr/>
+      <p:grpSpPr>
+        <a:xfrm>
+          <a:off x="0" y="0"/>
+          <a:ext cx="0" cy="0"/>
+          <a:chOff x="0" y="0"/>
+          <a:chExt cx="0" cy="0"/>
+        </a:xfrm>
+      </p:grpSpPr>
       <p:sp>
         <p:nvSpPr>
           <p:cNvPr id="2" name="Rectangle 1"/>
@@ -24593,6 +25192,7 @@
           <a:lstStyle/>
           <a:p>
             <a:pPr algn="ctr"/>
+            <a:endParaRPr/>
           </a:p>
         </p:txBody>
       </p:sp>
@@ -24716,6 +25316,7 @@
           <a:lstStyle/>
           <a:p>
             <a:pPr algn="ctr"/>
+            <a:endParaRPr/>
           </a:p>
         </p:txBody>
       </p:sp>
@@ -25115,6 +25716,7 @@
           <a:lstStyle/>
           <a:p>
             <a:pPr algn="ctr"/>
+            <a:endParaRPr/>
           </a:p>
         </p:txBody>
       </p:sp>
@@ -25167,7 +25769,7 @@
 </file>
 
 <file path=ppt/slides/slide19.xml><?xml version="1.0" encoding="utf-8"?>
-<p:sld xmlns:a="http://schemas.openxmlformats.org/drawingml/2006/main" xmlns:p="http://schemas.openxmlformats.org/presentationml/2006/main" xmlns:r="http://schemas.openxmlformats.org/officeDocument/2006/relationships">
+<p:sld xmlns:a="http://schemas.openxmlformats.org/drawingml/2006/main" xmlns:r="http://schemas.openxmlformats.org/officeDocument/2006/relationships" xmlns:p="http://schemas.openxmlformats.org/presentationml/2006/main">
   <p:cSld>
     <p:bg>
       <p:bgPr>
@@ -25183,7 +25785,14 @@
         <p:cNvGrpSpPr/>
         <p:nvPr/>
       </p:nvGrpSpPr>
-      <p:grpSpPr/>
+      <p:grpSpPr>
+        <a:xfrm>
+          <a:off x="0" y="0"/>
+          <a:ext cx="0" cy="0"/>
+          <a:chOff x="0" y="0"/>
+          <a:chExt cx="0" cy="0"/>
+        </a:xfrm>
+      </p:grpSpPr>
       <p:sp>
         <p:nvSpPr>
           <p:cNvPr id="2" name="Rectangle 1"/>
@@ -25224,6 +25833,7 @@
           <a:lstStyle/>
           <a:p>
             <a:pPr algn="ctr"/>
+            <a:endParaRPr/>
           </a:p>
         </p:txBody>
       </p:sp>
@@ -25347,6 +25957,7 @@
           <a:lstStyle/>
           <a:p>
             <a:pPr algn="ctr"/>
+            <a:endParaRPr/>
           </a:p>
         </p:txBody>
       </p:sp>
@@ -25390,6 +26001,7 @@
           <a:lstStyle/>
           <a:p>
             <a:pPr algn="ctr"/>
+            <a:endParaRPr/>
           </a:p>
         </p:txBody>
       </p:sp>
@@ -25644,6 +26256,7 @@
           <a:lstStyle/>
           <a:p>
             <a:pPr algn="ctr"/>
+            <a:endParaRPr/>
           </a:p>
         </p:txBody>
       </p:sp>
@@ -25771,6 +26384,7 @@
           <a:lstStyle/>
           <a:p>
             <a:pPr algn="ctr"/>
+            <a:endParaRPr/>
           </a:p>
         </p:txBody>
       </p:sp>
@@ -25898,6 +26512,7 @@
           <a:lstStyle/>
           <a:p>
             <a:pPr algn="ctr"/>
+            <a:endParaRPr/>
           </a:p>
         </p:txBody>
       </p:sp>
@@ -26025,6 +26640,7 @@
           <a:lstStyle/>
           <a:p>
             <a:pPr algn="ctr"/>
+            <a:endParaRPr/>
           </a:p>
         </p:txBody>
       </p:sp>
@@ -26077,7 +26693,7 @@
 </file>
 
 <file path=ppt/slides/slide2.xml><?xml version="1.0" encoding="utf-8"?>
-<p:sld xmlns:a="http://schemas.openxmlformats.org/drawingml/2006/main" xmlns:p="http://schemas.openxmlformats.org/presentationml/2006/main" xmlns:r="http://schemas.openxmlformats.org/officeDocument/2006/relationships">
+<p:sld xmlns:a="http://schemas.openxmlformats.org/drawingml/2006/main" xmlns:r="http://schemas.openxmlformats.org/officeDocument/2006/relationships" xmlns:p="http://schemas.openxmlformats.org/presentationml/2006/main">
   <p:cSld>
     <p:bg>
       <p:bgPr>
@@ -26093,7 +26709,14 @@
         <p:cNvGrpSpPr/>
         <p:nvPr/>
       </p:nvGrpSpPr>
-      <p:grpSpPr/>
+      <p:grpSpPr>
+        <a:xfrm>
+          <a:off x="0" y="0"/>
+          <a:ext cx="0" cy="0"/>
+          <a:chOff x="0" y="0"/>
+          <a:chExt cx="0" cy="0"/>
+        </a:xfrm>
+      </p:grpSpPr>
       <p:sp>
         <p:nvSpPr>
           <p:cNvPr id="2" name="Rectangle 1"/>
@@ -26134,6 +26757,7 @@
           <a:lstStyle/>
           <a:p>
             <a:pPr algn="ctr"/>
+            <a:endParaRPr/>
           </a:p>
         </p:txBody>
       </p:sp>
@@ -26217,6 +26841,7 @@
           <a:lstStyle/>
           <a:p>
             <a:pPr algn="ctr"/>
+            <a:endParaRPr/>
           </a:p>
         </p:txBody>
       </p:sp>
@@ -26256,7 +26881,7 @@
           </a:fontRef>
         </p:style>
         <p:txBody>
-          <a:bodyPr rtlCol="0" anchor="ctr" wrap="none"/>
+          <a:bodyPr wrap="none" rtlCol="0" anchor="ctr"/>
           <a:lstStyle/>
           <a:p>
             <a:pPr algn="ctr">
@@ -26393,6 +27018,7 @@
           <a:lstStyle/>
           <a:p>
             <a:pPr algn="ctr"/>
+            <a:endParaRPr/>
           </a:p>
         </p:txBody>
       </p:sp>
@@ -26432,7 +27058,7 @@
           </a:fontRef>
         </p:style>
         <p:txBody>
-          <a:bodyPr rtlCol="0" anchor="ctr" wrap="none"/>
+          <a:bodyPr wrap="none" rtlCol="0" anchor="ctr"/>
           <a:lstStyle/>
           <a:p>
             <a:pPr algn="ctr">
@@ -26569,6 +27195,7 @@
           <a:lstStyle/>
           <a:p>
             <a:pPr algn="ctr"/>
+            <a:endParaRPr/>
           </a:p>
         </p:txBody>
       </p:sp>
@@ -26608,7 +27235,7 @@
           </a:fontRef>
         </p:style>
         <p:txBody>
-          <a:bodyPr rtlCol="0" anchor="ctr" wrap="none"/>
+          <a:bodyPr wrap="none" rtlCol="0" anchor="ctr"/>
           <a:lstStyle/>
           <a:p>
             <a:pPr algn="ctr">
@@ -26745,6 +27372,7 @@
           <a:lstStyle/>
           <a:p>
             <a:pPr algn="ctr"/>
+            <a:endParaRPr/>
           </a:p>
         </p:txBody>
       </p:sp>
@@ -26784,7 +27412,7 @@
           </a:fontRef>
         </p:style>
         <p:txBody>
-          <a:bodyPr rtlCol="0" anchor="ctr" wrap="none"/>
+          <a:bodyPr wrap="none" rtlCol="0" anchor="ctr"/>
           <a:lstStyle/>
           <a:p>
             <a:pPr algn="ctr">
@@ -26921,6 +27549,7 @@
           <a:lstStyle/>
           <a:p>
             <a:pPr algn="ctr"/>
+            <a:endParaRPr/>
           </a:p>
         </p:txBody>
       </p:sp>
@@ -26960,7 +27589,7 @@
           </a:fontRef>
         </p:style>
         <p:txBody>
-          <a:bodyPr rtlCol="0" anchor="ctr" wrap="none"/>
+          <a:bodyPr wrap="none" rtlCol="0" anchor="ctr"/>
           <a:lstStyle/>
           <a:p>
             <a:pPr algn="ctr">
@@ -27097,6 +27726,7 @@
           <a:lstStyle/>
           <a:p>
             <a:pPr algn="ctr"/>
+            <a:endParaRPr/>
           </a:p>
         </p:txBody>
       </p:sp>
@@ -27136,7 +27766,7 @@
           </a:fontRef>
         </p:style>
         <p:txBody>
-          <a:bodyPr rtlCol="0" anchor="ctr" wrap="none"/>
+          <a:bodyPr wrap="none" rtlCol="0" anchor="ctr"/>
           <a:lstStyle/>
           <a:p>
             <a:pPr algn="ctr">
@@ -27273,6 +27903,7 @@
           <a:lstStyle/>
           <a:p>
             <a:pPr algn="ctr"/>
+            <a:endParaRPr/>
           </a:p>
         </p:txBody>
       </p:sp>
@@ -27325,7 +27956,7 @@
 </file>
 
 <file path=ppt/slides/slide20.xml><?xml version="1.0" encoding="utf-8"?>
-<p:sld xmlns:a="http://schemas.openxmlformats.org/drawingml/2006/main" xmlns:p="http://schemas.openxmlformats.org/presentationml/2006/main" xmlns:r="http://schemas.openxmlformats.org/officeDocument/2006/relationships">
+<p:sld xmlns:a="http://schemas.openxmlformats.org/drawingml/2006/main" xmlns:r="http://schemas.openxmlformats.org/officeDocument/2006/relationships" xmlns:p="http://schemas.openxmlformats.org/presentationml/2006/main">
   <p:cSld>
     <p:bg>
       <p:bgPr>
@@ -27341,7 +27972,14 @@
         <p:cNvGrpSpPr/>
         <p:nvPr/>
       </p:nvGrpSpPr>
-      <p:grpSpPr/>
+      <p:grpSpPr>
+        <a:xfrm>
+          <a:off x="0" y="0"/>
+          <a:ext cx="0" cy="0"/>
+          <a:chOff x="0" y="0"/>
+          <a:chExt cx="0" cy="0"/>
+        </a:xfrm>
+      </p:grpSpPr>
       <p:sp>
         <p:nvSpPr>
           <p:cNvPr id="2" name="Rectangle 1"/>
@@ -27382,6 +28020,7 @@
           <a:lstStyle/>
           <a:p>
             <a:pPr algn="ctr"/>
+            <a:endParaRPr dirty="0"/>
           </a:p>
         </p:txBody>
       </p:sp>
@@ -27425,6 +28064,7 @@
           <a:lstStyle/>
           <a:p>
             <a:pPr algn="ctr"/>
+            <a:endParaRPr/>
           </a:p>
         </p:txBody>
       </p:sp>
@@ -27622,9 +28262,7 @@
                 <a:latin typeface="Microsoft YaHei"/>
               </a:defRPr>
             </a:pPr>
-            <a:r>
-              <a:t>欢迎提问  ·  Q &amp; A</a:t>
-            </a:r>
+            <a:endParaRPr dirty="0"/>
           </a:p>
         </p:txBody>
       </p:sp>
@@ -27637,7 +28275,7 @@
 </file>
 
 <file path=ppt/slides/slide3.xml><?xml version="1.0" encoding="utf-8"?>
-<p:sld xmlns:a="http://schemas.openxmlformats.org/drawingml/2006/main" xmlns:p="http://schemas.openxmlformats.org/presentationml/2006/main" xmlns:r="http://schemas.openxmlformats.org/officeDocument/2006/relationships">
+<p:sld xmlns:a="http://schemas.openxmlformats.org/drawingml/2006/main" xmlns:r="http://schemas.openxmlformats.org/officeDocument/2006/relationships" xmlns:p="http://schemas.openxmlformats.org/presentationml/2006/main">
   <p:cSld>
     <p:bg>
       <p:bgPr>
@@ -27653,7 +28291,14 @@
         <p:cNvGrpSpPr/>
         <p:nvPr/>
       </p:nvGrpSpPr>
-      <p:grpSpPr/>
+      <p:grpSpPr>
+        <a:xfrm>
+          <a:off x="0" y="0"/>
+          <a:ext cx="0" cy="0"/>
+          <a:chOff x="0" y="0"/>
+          <a:chExt cx="0" cy="0"/>
+        </a:xfrm>
+      </p:grpSpPr>
       <p:sp>
         <p:nvSpPr>
           <p:cNvPr id="2" name="Rectangle 1"/>
@@ -27694,6 +28339,7 @@
           <a:lstStyle/>
           <a:p>
             <a:pPr algn="ctr"/>
+            <a:endParaRPr/>
           </a:p>
         </p:txBody>
       </p:sp>
@@ -27817,6 +28463,7 @@
           <a:lstStyle/>
           <a:p>
             <a:pPr algn="ctr"/>
+            <a:endParaRPr/>
           </a:p>
         </p:txBody>
       </p:sp>
@@ -27969,6 +28616,7 @@
           <a:lstStyle/>
           <a:p>
             <a:pPr algn="ctr"/>
+            <a:endParaRPr/>
           </a:p>
         </p:txBody>
       </p:sp>
@@ -28096,6 +28744,7 @@
           <a:lstStyle/>
           <a:p>
             <a:pPr algn="ctr"/>
+            <a:endParaRPr/>
           </a:p>
         </p:txBody>
       </p:sp>
@@ -28223,6 +28872,7 @@
           <a:lstStyle/>
           <a:p>
             <a:pPr algn="ctr"/>
+            <a:endParaRPr/>
           </a:p>
         </p:txBody>
       </p:sp>
@@ -28350,6 +29000,7 @@
           <a:lstStyle/>
           <a:p>
             <a:pPr algn="ctr"/>
+            <a:endParaRPr/>
           </a:p>
         </p:txBody>
       </p:sp>
@@ -28477,6 +29128,7 @@
           <a:lstStyle/>
           <a:p>
             <a:pPr algn="ctr"/>
+            <a:endParaRPr/>
           </a:p>
         </p:txBody>
       </p:sp>
@@ -28577,6 +29229,7 @@
           <a:lstStyle/>
           <a:p>
             <a:pPr algn="ctr"/>
+            <a:endParaRPr/>
           </a:p>
         </p:txBody>
       </p:sp>
@@ -28629,7 +29282,7 @@
 </file>
 
 <file path=ppt/slides/slide4.xml><?xml version="1.0" encoding="utf-8"?>
-<p:sld xmlns:a="http://schemas.openxmlformats.org/drawingml/2006/main" xmlns:p="http://schemas.openxmlformats.org/presentationml/2006/main" xmlns:r="http://schemas.openxmlformats.org/officeDocument/2006/relationships">
+<p:sld xmlns:a="http://schemas.openxmlformats.org/drawingml/2006/main" xmlns:r="http://schemas.openxmlformats.org/officeDocument/2006/relationships" xmlns:p="http://schemas.openxmlformats.org/presentationml/2006/main">
   <p:cSld>
     <p:bg>
       <p:bgPr>
@@ -28645,7 +29298,14 @@
         <p:cNvGrpSpPr/>
         <p:nvPr/>
       </p:nvGrpSpPr>
-      <p:grpSpPr/>
+      <p:grpSpPr>
+        <a:xfrm>
+          <a:off x="0" y="0"/>
+          <a:ext cx="0" cy="0"/>
+          <a:chOff x="0" y="0"/>
+          <a:chExt cx="0" cy="0"/>
+        </a:xfrm>
+      </p:grpSpPr>
       <p:sp>
         <p:nvSpPr>
           <p:cNvPr id="2" name="Rectangle 1"/>
@@ -28686,6 +29346,7 @@
           <a:lstStyle/>
           <a:p>
             <a:pPr algn="ctr"/>
+            <a:endParaRPr/>
           </a:p>
         </p:txBody>
       </p:sp>
@@ -28809,6 +29470,7 @@
           <a:lstStyle/>
           <a:p>
             <a:pPr algn="ctr"/>
+            <a:endParaRPr/>
           </a:p>
         </p:txBody>
       </p:sp>
@@ -28852,6 +29514,7 @@
           <a:lstStyle/>
           <a:p>
             <a:pPr algn="ctr"/>
+            <a:endParaRPr/>
           </a:p>
         </p:txBody>
       </p:sp>
@@ -29066,6 +29729,7 @@
           <a:lstStyle/>
           <a:p>
             <a:pPr algn="ctr"/>
+            <a:endParaRPr/>
           </a:p>
         </p:txBody>
       </p:sp>
@@ -29280,6 +29944,7 @@
           <a:lstStyle/>
           <a:p>
             <a:pPr algn="ctr"/>
+            <a:endParaRPr/>
           </a:p>
         </p:txBody>
       </p:sp>
@@ -29621,6 +30286,7 @@
           <a:lstStyle/>
           <a:p>
             <a:pPr algn="ctr"/>
+            <a:endParaRPr/>
           </a:p>
         </p:txBody>
       </p:sp>
@@ -29673,7 +30339,7 @@
 </file>
 
 <file path=ppt/slides/slide5.xml><?xml version="1.0" encoding="utf-8"?>
-<p:sld xmlns:a="http://schemas.openxmlformats.org/drawingml/2006/main" xmlns:p="http://schemas.openxmlformats.org/presentationml/2006/main" xmlns:r="http://schemas.openxmlformats.org/officeDocument/2006/relationships">
+<p:sld xmlns:a="http://schemas.openxmlformats.org/drawingml/2006/main" xmlns:r="http://schemas.openxmlformats.org/officeDocument/2006/relationships" xmlns:p="http://schemas.openxmlformats.org/presentationml/2006/main">
   <p:cSld>
     <p:bg>
       <p:bgPr>
@@ -29689,7 +30355,14 @@
         <p:cNvGrpSpPr/>
         <p:nvPr/>
       </p:nvGrpSpPr>
-      <p:grpSpPr/>
+      <p:grpSpPr>
+        <a:xfrm>
+          <a:off x="0" y="0"/>
+          <a:ext cx="0" cy="0"/>
+          <a:chOff x="0" y="0"/>
+          <a:chExt cx="0" cy="0"/>
+        </a:xfrm>
+      </p:grpSpPr>
       <p:sp>
         <p:nvSpPr>
           <p:cNvPr id="2" name="Rectangle 1"/>
@@ -29730,6 +30403,7 @@
           <a:lstStyle/>
           <a:p>
             <a:pPr algn="ctr"/>
+            <a:endParaRPr/>
           </a:p>
         </p:txBody>
       </p:sp>
@@ -29853,6 +30527,7 @@
           <a:lstStyle/>
           <a:p>
             <a:pPr algn="ctr"/>
+            <a:endParaRPr/>
           </a:p>
         </p:txBody>
       </p:sp>
@@ -29896,6 +30571,7 @@
           <a:lstStyle/>
           <a:p>
             <a:pPr algn="ctr"/>
+            <a:endParaRPr/>
           </a:p>
         </p:txBody>
       </p:sp>
@@ -29907,8 +30583,8 @@
         </p:nvSpPr>
         <p:spPr>
           <a:xfrm>
-            <a:off x="822960" y="1417320"/>
-            <a:ext cx="10515600" cy="457200"/>
+            <a:off x="777240" y="1470134"/>
+            <a:ext cx="10789920" cy="457200"/>
           </a:xfrm>
           <a:prstGeom prst="rect">
             <a:avLst/>
@@ -29934,7 +30610,12 @@
               </a:defRPr>
             </a:pPr>
             <a:r>
-              <a:t>核心问题：如何利用双通道长时序传感信号，在减少人工特征设计的前提下，实现管道泄漏状态识别与泄漏距离估计？</a:t>
+              <a:rPr dirty="0" err="1"/>
+              <a:t>核心问题：如何利用双通道长时序传感信号，在减少人工特征设计的前提下，实现管道泄漏状态识别与泄漏距离估计</a:t>
+            </a:r>
+            <a:r>
+              <a:rPr dirty="0"/>
+              <a:t>？</a:t>
             </a:r>
           </a:p>
         </p:txBody>
@@ -29979,6 +30660,7 @@
           <a:lstStyle/>
           <a:p>
             <a:pPr algn="ctr"/>
+            <a:endParaRPr/>
           </a:p>
         </p:txBody>
       </p:sp>
@@ -30106,6 +30788,7 @@
           <a:lstStyle/>
           <a:p>
             <a:pPr algn="ctr"/>
+            <a:endParaRPr/>
           </a:p>
         </p:txBody>
       </p:sp>
@@ -30233,6 +30916,7 @@
           <a:lstStyle/>
           <a:p>
             <a:pPr algn="ctr"/>
+            <a:endParaRPr/>
           </a:p>
         </p:txBody>
       </p:sp>
@@ -30469,6 +31153,7 @@
           <a:lstStyle/>
           <a:p>
             <a:pPr algn="ctr"/>
+            <a:endParaRPr/>
           </a:p>
         </p:txBody>
       </p:sp>
@@ -30521,7 +31206,7 @@
 </file>
 
 <file path=ppt/slides/slide6.xml><?xml version="1.0" encoding="utf-8"?>
-<p:sld xmlns:a="http://schemas.openxmlformats.org/drawingml/2006/main" xmlns:p="http://schemas.openxmlformats.org/presentationml/2006/main" xmlns:r="http://schemas.openxmlformats.org/officeDocument/2006/relationships">
+<p:sld xmlns:a="http://schemas.openxmlformats.org/drawingml/2006/main" xmlns:r="http://schemas.openxmlformats.org/officeDocument/2006/relationships" xmlns:p="http://schemas.openxmlformats.org/presentationml/2006/main">
   <p:cSld>
     <p:bg>
       <p:bgPr>
@@ -30537,7 +31222,14 @@
         <p:cNvGrpSpPr/>
         <p:nvPr/>
       </p:nvGrpSpPr>
-      <p:grpSpPr/>
+      <p:grpSpPr>
+        <a:xfrm>
+          <a:off x="0" y="0"/>
+          <a:ext cx="0" cy="0"/>
+          <a:chOff x="0" y="0"/>
+          <a:chExt cx="0" cy="0"/>
+        </a:xfrm>
+      </p:grpSpPr>
       <p:sp>
         <p:nvSpPr>
           <p:cNvPr id="2" name="Rectangle 1"/>
@@ -30578,6 +31270,7 @@
           <a:lstStyle/>
           <a:p>
             <a:pPr algn="ctr"/>
+            <a:endParaRPr/>
           </a:p>
         </p:txBody>
       </p:sp>
@@ -30701,6 +31394,7 @@
           <a:lstStyle/>
           <a:p>
             <a:pPr algn="ctr"/>
+            <a:endParaRPr/>
           </a:p>
         </p:txBody>
       </p:sp>
@@ -31002,6 +31696,7 @@
           <a:lstStyle/>
           <a:p>
             <a:pPr algn="ctr"/>
+            <a:endParaRPr/>
           </a:p>
         </p:txBody>
       </p:sp>
@@ -31198,6 +31893,7 @@
           <a:lstStyle/>
           <a:p>
             <a:pPr algn="ctr"/>
+            <a:endParaRPr/>
           </a:p>
         </p:txBody>
       </p:sp>
@@ -31250,7 +31946,7 @@
 </file>
 
 <file path=ppt/slides/slide7.xml><?xml version="1.0" encoding="utf-8"?>
-<p:sld xmlns:a="http://schemas.openxmlformats.org/drawingml/2006/main" xmlns:p="http://schemas.openxmlformats.org/presentationml/2006/main" xmlns:r="http://schemas.openxmlformats.org/officeDocument/2006/relationships">
+<p:sld xmlns:a="http://schemas.openxmlformats.org/drawingml/2006/main" xmlns:r="http://schemas.openxmlformats.org/officeDocument/2006/relationships" xmlns:p="http://schemas.openxmlformats.org/presentationml/2006/main">
   <p:cSld>
     <p:bg>
       <p:bgPr>
@@ -31266,7 +31962,14 @@
         <p:cNvGrpSpPr/>
         <p:nvPr/>
       </p:nvGrpSpPr>
-      <p:grpSpPr/>
+      <p:grpSpPr>
+        <a:xfrm>
+          <a:off x="0" y="0"/>
+          <a:ext cx="0" cy="0"/>
+          <a:chOff x="0" y="0"/>
+          <a:chExt cx="0" cy="0"/>
+        </a:xfrm>
+      </p:grpSpPr>
       <p:sp>
         <p:nvSpPr>
           <p:cNvPr id="2" name="Rectangle 1"/>
@@ -31307,6 +32010,7 @@
           <a:lstStyle/>
           <a:p>
             <a:pPr algn="ctr"/>
+            <a:endParaRPr/>
           </a:p>
         </p:txBody>
       </p:sp>
@@ -31430,6 +32134,7 @@
           <a:lstStyle/>
           <a:p>
             <a:pPr algn="ctr"/>
+            <a:endParaRPr/>
           </a:p>
         </p:txBody>
       </p:sp>
@@ -31473,6 +32178,7 @@
           <a:lstStyle/>
           <a:p>
             <a:pPr algn="ctr"/>
+            <a:endParaRPr/>
           </a:p>
         </p:txBody>
       </p:sp>
@@ -31511,12 +32217,50 @@
               </a:defRPr>
             </a:pPr>
             <a:r>
+              <a:rPr dirty="0" err="1"/>
               <a:t>数据集统计</a:t>
             </a:r>
-            <a:br/>
-            <a:r>
-              <a:t>Stage2: 11,704 样本 | Stage1: 3,737 配对样本</a:t>
-            </a:r>
+            <a:br>
+              <a:rPr dirty="0"/>
+            </a:br>
+            <a:r>
+              <a:rPr dirty="0"/>
+              <a:t>Stage2: 11,704 </a:t>
+            </a:r>
+            <a:r>
+              <a:rPr dirty="0" err="1"/>
+              <a:t>样本</a:t>
+            </a:r>
+            <a:r>
+              <a:rPr dirty="0"/>
+              <a:t> | </a:t>
+            </a:r>
+            <a:endParaRPr lang="en-US" dirty="0"/>
+          </a:p>
+          <a:p>
+            <a:pPr algn="ctr">
+              <a:spcBef>
+                <a:spcPts val="0"/>
+              </a:spcBef>
+              <a:spcAft>
+                <a:spcPts val="0"/>
+              </a:spcAft>
+              <a:defRPr sz="1400" b="1">
+                <a:solidFill>
+                  <a:srgbClr val="FFFFFF"/>
+                </a:solidFill>
+                <a:latin typeface="Microsoft YaHei"/>
+              </a:defRPr>
+            </a:pPr>
+            <a:r>
+              <a:rPr dirty="0"/>
+              <a:t>Stage1: 3,737 </a:t>
+            </a:r>
+            <a:r>
+              <a:rPr dirty="0" err="1"/>
+              <a:t>配对样本</a:t>
+            </a:r>
+            <a:endParaRPr dirty="0"/>
           </a:p>
         </p:txBody>
       </p:sp>
@@ -31560,6 +32304,7 @@
           <a:lstStyle/>
           <a:p>
             <a:pPr algn="ctr"/>
+            <a:endParaRPr/>
           </a:p>
         </p:txBody>
       </p:sp>
@@ -31572,7 +32317,7 @@
         <p:spPr>
           <a:xfrm>
             <a:off x="822960" y="2743200"/>
-            <a:ext cx="1828800" cy="365760"/>
+            <a:ext cx="1983302" cy="365760"/>
           </a:xfrm>
           <a:prstGeom prst="rect">
             <a:avLst/>
@@ -31598,8 +32343,14 @@
               </a:defRPr>
             </a:pPr>
             <a:r>
-              <a:t>Stage2 分类任务</a:t>
-            </a:r>
+              <a:rPr dirty="0"/>
+              <a:t>Stage2 </a:t>
+            </a:r>
+            <a:r>
+              <a:rPr dirty="0" err="1"/>
+              <a:t>分类任务</a:t>
+            </a:r>
+            <a:endParaRPr dirty="0"/>
           </a:p>
         </p:txBody>
       </p:sp>
@@ -31641,7 +32392,12 @@
               </a:defRPr>
             </a:pPr>
             <a:r>
-              <a:t>输入：单通道分段信号 (1 × 128,000)</a:t>
+              <a:rPr dirty="0" err="1"/>
+              <a:t>输入：单通道分段信号</a:t>
+            </a:r>
+            <a:r>
+              <a:rPr dirty="0"/>
+              <a:t> (1 × 128,000)</a:t>
             </a:r>
           </a:p>
           <a:p>
@@ -31663,7 +32419,20 @@
               </a:defRPr>
             </a:pPr>
             <a:r>
-              <a:t>输出：五类标签（正常 + 多类泄漏形态）</a:t>
+              <a:rPr dirty="0" err="1"/>
+              <a:t>输出：五类标签（正常</a:t>
+            </a:r>
+            <a:r>
+              <a:rPr dirty="0"/>
+              <a:t> + </a:t>
+            </a:r>
+            <a:r>
+              <a:rPr dirty="0" err="1"/>
+              <a:t>多类泄漏形态</a:t>
+            </a:r>
+            <a:r>
+              <a:rPr dirty="0"/>
+              <a:t>）</a:t>
             </a:r>
           </a:p>
           <a:p>
@@ -31685,7 +32454,12 @@
               </a:defRPr>
             </a:pPr>
             <a:r>
-              <a:t>损失函数：交叉熵损失 (Cross-Entropy)</a:t>
+              <a:rPr dirty="0" err="1"/>
+              <a:t>损失函数：交叉熵损失</a:t>
+            </a:r>
+            <a:r>
+              <a:rPr dirty="0"/>
+              <a:t> (Cross-Entropy)</a:t>
             </a:r>
           </a:p>
           <a:p>
@@ -31707,6 +32481,7 @@
               </a:defRPr>
             </a:pPr>
             <a:r>
+              <a:rPr dirty="0"/>
               <a:t>评价指标：Accuracy、Macro-F1、混淆矩阵</a:t>
             </a:r>
           </a:p>
@@ -31729,8 +32504,18 @@
               </a:defRPr>
             </a:pPr>
             <a:r>
-              <a:t>评测层级：片段级 + 文件级聚合</a:t>
-            </a:r>
+              <a:rPr dirty="0" err="1"/>
+              <a:t>评测层级：片段级</a:t>
+            </a:r>
+            <a:r>
+              <a:rPr dirty="0"/>
+              <a:t> + </a:t>
+            </a:r>
+            <a:r>
+              <a:rPr dirty="0" err="1"/>
+              <a:t>文件级聚合</a:t>
+            </a:r>
+            <a:endParaRPr dirty="0"/>
           </a:p>
           <a:p>
             <a:pPr algn="l">
@@ -31751,7 +32536,20 @@
               </a:defRPr>
             </a:pPr>
             <a:r>
-              <a:t>训练/验证/测试：7,940 / 2,464 / 1,300</a:t>
+              <a:rPr dirty="0" err="1"/>
+              <a:t>训练</a:t>
+            </a:r>
+            <a:r>
+              <a:rPr dirty="0"/>
+              <a:t>/</a:t>
+            </a:r>
+            <a:r>
+              <a:rPr dirty="0" err="1"/>
+              <a:t>验证</a:t>
+            </a:r>
+            <a:r>
+              <a:rPr dirty="0"/>
+              <a:t>/测试：7,940 / 2,464 / 1,300</a:t>
             </a:r>
           </a:p>
         </p:txBody>
@@ -31796,6 +32594,7 @@
           <a:lstStyle/>
           <a:p>
             <a:pPr algn="ctr"/>
+            <a:endParaRPr/>
           </a:p>
         </p:txBody>
       </p:sp>
@@ -31807,8 +32606,8 @@
         </p:nvSpPr>
         <p:spPr>
           <a:xfrm>
-            <a:off x="6492240" y="2743200"/>
-            <a:ext cx="1828800" cy="365760"/>
+            <a:off x="6492239" y="2743200"/>
+            <a:ext cx="1958077" cy="365760"/>
           </a:xfrm>
           <a:prstGeom prst="rect">
             <a:avLst/>
@@ -31834,8 +32633,14 @@
               </a:defRPr>
             </a:pPr>
             <a:r>
-              <a:t>Stage1 回归任务</a:t>
-            </a:r>
+              <a:rPr dirty="0"/>
+              <a:t>Stage1 </a:t>
+            </a:r>
+            <a:r>
+              <a:rPr dirty="0" err="1"/>
+              <a:t>回归任务</a:t>
+            </a:r>
+            <a:endParaRPr dirty="0"/>
           </a:p>
         </p:txBody>
       </p:sp>
@@ -32032,6 +32837,7 @@
           <a:lstStyle/>
           <a:p>
             <a:pPr algn="ctr"/>
+            <a:endParaRPr/>
           </a:p>
         </p:txBody>
       </p:sp>
@@ -32043,7 +32849,7 @@
         </p:nvSpPr>
         <p:spPr>
           <a:xfrm>
-            <a:off x="822960" y="5897880"/>
+            <a:off x="838047" y="5943600"/>
             <a:ext cx="10515600" cy="411480"/>
           </a:xfrm>
           <a:prstGeom prst="rect">
@@ -32115,6 +32921,7 @@
           <a:lstStyle/>
           <a:p>
             <a:pPr algn="ctr"/>
+            <a:endParaRPr/>
           </a:p>
         </p:txBody>
       </p:sp>
@@ -32167,7 +32974,7 @@
 </file>
 
 <file path=ppt/slides/slide8.xml><?xml version="1.0" encoding="utf-8"?>
-<p:sld xmlns:a="http://schemas.openxmlformats.org/drawingml/2006/main" xmlns:p="http://schemas.openxmlformats.org/presentationml/2006/main" xmlns:r="http://schemas.openxmlformats.org/officeDocument/2006/relationships">
+<p:sld xmlns:a="http://schemas.openxmlformats.org/drawingml/2006/main" xmlns:r="http://schemas.openxmlformats.org/officeDocument/2006/relationships" xmlns:p="http://schemas.openxmlformats.org/presentationml/2006/main">
   <p:cSld>
     <p:bg>
       <p:bgPr>
@@ -32183,7 +32990,14 @@
         <p:cNvGrpSpPr/>
         <p:nvPr/>
       </p:nvGrpSpPr>
-      <p:grpSpPr/>
+      <p:grpSpPr>
+        <a:xfrm>
+          <a:off x="0" y="0"/>
+          <a:ext cx="0" cy="0"/>
+          <a:chOff x="0" y="0"/>
+          <a:chExt cx="0" cy="0"/>
+        </a:xfrm>
+      </p:grpSpPr>
       <p:sp>
         <p:nvSpPr>
           <p:cNvPr id="2" name="Rectangle 1"/>
@@ -32224,6 +33038,7 @@
           <a:lstStyle/>
           <a:p>
             <a:pPr algn="ctr"/>
+            <a:endParaRPr/>
           </a:p>
         </p:txBody>
       </p:sp>
@@ -32347,6 +33162,7 @@
           <a:lstStyle/>
           <a:p>
             <a:pPr algn="ctr"/>
+            <a:endParaRPr/>
           </a:p>
         </p:txBody>
       </p:sp>
@@ -32390,6 +33206,7 @@
           <a:lstStyle/>
           <a:p>
             <a:pPr algn="ctr"/>
+            <a:endParaRPr/>
           </a:p>
         </p:txBody>
       </p:sp>
@@ -32477,6 +33294,7 @@
           <a:lstStyle/>
           <a:p>
             <a:pPr algn="ctr"/>
+            <a:endParaRPr/>
           </a:p>
         </p:txBody>
       </p:sp>
@@ -32564,6 +33382,7 @@
           <a:lstStyle/>
           <a:p>
             <a:pPr algn="ctr"/>
+            <a:endParaRPr/>
           </a:p>
         </p:txBody>
       </p:sp>
@@ -32651,6 +33470,7 @@
           <a:lstStyle/>
           <a:p>
             <a:pPr algn="ctr"/>
+            <a:endParaRPr/>
           </a:p>
         </p:txBody>
       </p:sp>
@@ -32734,6 +33554,7 @@
           <a:lstStyle/>
           <a:p>
             <a:pPr algn="ctr"/>
+            <a:endParaRPr/>
           </a:p>
         </p:txBody>
       </p:sp>
@@ -32821,6 +33642,7 @@
           <a:lstStyle/>
           <a:p>
             <a:pPr algn="ctr"/>
+            <a:endParaRPr/>
           </a:p>
         </p:txBody>
       </p:sp>
@@ -33239,6 +34061,7 @@
           <a:lstStyle/>
           <a:p>
             <a:pPr algn="ctr"/>
+            <a:endParaRPr/>
           </a:p>
         </p:txBody>
       </p:sp>
@@ -33291,7 +34114,7 @@
 </file>
 
 <file path=ppt/slides/slide9.xml><?xml version="1.0" encoding="utf-8"?>
-<p:sld xmlns:a="http://schemas.openxmlformats.org/drawingml/2006/main" xmlns:p="http://schemas.openxmlformats.org/presentationml/2006/main" xmlns:r="http://schemas.openxmlformats.org/officeDocument/2006/relationships">
+<p:sld xmlns:a="http://schemas.openxmlformats.org/drawingml/2006/main" xmlns:r="http://schemas.openxmlformats.org/officeDocument/2006/relationships" xmlns:p="http://schemas.openxmlformats.org/presentationml/2006/main">
   <p:cSld>
     <p:bg>
       <p:bgPr>
@@ -33307,7 +34130,14 @@
         <p:cNvGrpSpPr/>
         <p:nvPr/>
       </p:nvGrpSpPr>
-      <p:grpSpPr/>
+      <p:grpSpPr>
+        <a:xfrm>
+          <a:off x="0" y="0"/>
+          <a:ext cx="0" cy="0"/>
+          <a:chOff x="0" y="0"/>
+          <a:chExt cx="0" cy="0"/>
+        </a:xfrm>
+      </p:grpSpPr>
       <p:sp>
         <p:nvSpPr>
           <p:cNvPr id="2" name="Rectangle 1"/>
@@ -33348,6 +34178,7 @@
           <a:lstStyle/>
           <a:p>
             <a:pPr algn="ctr"/>
+            <a:endParaRPr/>
           </a:p>
         </p:txBody>
       </p:sp>
@@ -33471,6 +34302,7 @@
           <a:lstStyle/>
           <a:p>
             <a:pPr algn="ctr"/>
+            <a:endParaRPr/>
           </a:p>
         </p:txBody>
       </p:sp>
@@ -33554,6 +34386,7 @@
           <a:lstStyle/>
           <a:p>
             <a:pPr algn="ctr"/>
+            <a:endParaRPr/>
           </a:p>
         </p:txBody>
       </p:sp>
@@ -33801,6 +34634,7 @@
           <a:lstStyle/>
           <a:p>
             <a:pPr algn="ctr"/>
+            <a:endParaRPr/>
           </a:p>
         </p:txBody>
       </p:sp>
@@ -34048,6 +34882,7 @@
           <a:lstStyle/>
           <a:p>
             <a:pPr algn="ctr"/>
+            <a:endParaRPr/>
           </a:p>
         </p:txBody>
       </p:sp>
@@ -34295,6 +35130,7 @@
           <a:lstStyle/>
           <a:p>
             <a:pPr algn="ctr"/>
+            <a:endParaRPr/>
           </a:p>
         </p:txBody>
       </p:sp>
@@ -34542,6 +35378,7 @@
           <a:lstStyle/>
           <a:p>
             <a:pPr algn="ctr"/>
+            <a:endParaRPr/>
           </a:p>
         </p:txBody>
       </p:sp>
@@ -34713,7 +35550,7 @@
         </p:nvSpPr>
         <p:spPr>
           <a:xfrm>
-            <a:off x="640080" y="5669280"/>
+            <a:off x="640080" y="5577840"/>
             <a:ext cx="10881360" cy="914400"/>
           </a:xfrm>
           <a:prstGeom prst="rect">
@@ -34743,7 +35580,32 @@
               </a:defRPr>
             </a:pPr>
             <a:r>
-              <a:t>● 每层 = Conv1d + BatchNorm + GELU + Conv1d + BatchNorm + GELU</a:t>
+              <a:rPr dirty="0"/>
+              <a:t>● </a:t>
+            </a:r>
+            <a:r>
+              <a:rPr dirty="0" err="1"/>
+              <a:t>每层</a:t>
+            </a:r>
+            <a:r>
+              <a:rPr dirty="0"/>
+              <a:t> = Conv1d + </a:t>
+            </a:r>
+            <a:r>
+              <a:rPr dirty="0" err="1"/>
+              <a:t>BatchNorm</a:t>
+            </a:r>
+            <a:r>
+              <a:rPr dirty="0"/>
+              <a:t> + GELU + Conv1d + </a:t>
+            </a:r>
+            <a:r>
+              <a:rPr dirty="0" err="1"/>
+              <a:t>BatchNorm</a:t>
+            </a:r>
+            <a:r>
+              <a:rPr dirty="0"/>
+              <a:t> + GELU</a:t>
             </a:r>
           </a:p>
           <a:p>
@@ -34765,7 +35627,24 @@
               </a:defRPr>
             </a:pPr>
             <a:r>
-              <a:t>● 步长 4 逐步降采样：时序长度每次缩至 1/4，感受野逐层扩大</a:t>
+              <a:rPr dirty="0"/>
+              <a:t>● </a:t>
+            </a:r>
+            <a:r>
+              <a:rPr dirty="0" err="1"/>
+              <a:t>步长</a:t>
+            </a:r>
+            <a:r>
+              <a:rPr dirty="0"/>
+              <a:t> 4 </a:t>
+            </a:r>
+            <a:r>
+              <a:rPr dirty="0" err="1"/>
+              <a:t>逐步降采样：时序长度每次缩至</a:t>
+            </a:r>
+            <a:r>
+              <a:rPr dirty="0"/>
+              <a:t> 1/4，感受野逐层扩大</a:t>
             </a:r>
           </a:p>
           <a:p>
@@ -34787,8 +35666,22 @@
               </a:defRPr>
             </a:pPr>
             <a:r>
-              <a:t>● GELU 激活函数：相比 ReLU，负值区域保留信息，非线性更平滑</a:t>
-            </a:r>
+              <a:rPr dirty="0"/>
+              <a:t>● GELU </a:t>
+            </a:r>
+            <a:r>
+              <a:rPr dirty="0" err="1"/>
+              <a:t>激活函数：相比</a:t>
+            </a:r>
+            <a:r>
+              <a:rPr dirty="0"/>
+              <a:t> </a:t>
+            </a:r>
+            <a:r>
+              <a:rPr dirty="0" err="1"/>
+              <a:t>ReLU，负值区域保留信息，非线性更平滑</a:t>
+            </a:r>
+            <a:endParaRPr dirty="0"/>
           </a:p>
           <a:p>
             <a:pPr algn="l">
@@ -34809,8 +35702,14 @@
               </a:defRPr>
             </a:pPr>
             <a:r>
-              <a:t>● 全局平均池化：减少参数量，降低过拟合风险</a:t>
-            </a:r>
+              <a:rPr dirty="0"/>
+              <a:t>● </a:t>
+            </a:r>
+            <a:r>
+              <a:rPr dirty="0" err="1"/>
+              <a:t>全局平均池化：减少参数量，降低过拟合风险</a:t>
+            </a:r>
+            <a:endParaRPr dirty="0"/>
           </a:p>
         </p:txBody>
       </p:sp>
@@ -34854,6 +35753,7 @@
           <a:lstStyle/>
           <a:p>
             <a:pPr algn="ctr"/>
+            <a:endParaRPr/>
           </a:p>
         </p:txBody>
       </p:sp>
